--- a/Materjalid/Day10 Andmekaitse/10-paev-andmetarkus-esitlus.pptx
+++ b/Materjalid/Day10 Andmekaitse/10-paev-andmetarkus-esitlus.pptx
@@ -306,7 +306,7 @@
           <a:p>
             <a:fld id="{F9D2AD6E-DEDD-49A0-A4BE-7A081A9112DA}" type="datetimeFigureOut">
               <a:rPr lang="en-US" smtClean="0"/>
-              <a:t>8/27/2026</a:t>
+              <a:t>8/28/2026</a:t>
             </a:fld>
             <a:endParaRPr lang="en-US"/>
           </a:p>
@@ -482,7 +482,7 @@
           </a:lstStyle>
           <a:p>
             <a:fld id="{2AF9C1A6-4321-41FA-B001-4140F0E2457F}" type="datetimeFigureOut">
-              <a:t>27.08.2026</a:t>
+              <a:t>28.08.2026</a:t>
             </a:fld>
             <a:endParaRPr lang="en-US"/>
           </a:p>
@@ -15886,7 +15886,7 @@
           <a:p>
             <a:fld id="{DE840A40-73C8-4048-8140-49F5D65BB431}" type="datetimeFigureOut">
               <a:rPr lang="et-EE" smtClean="0"/>
-              <a:t>27.08.2026</a:t>
+              <a:t>28.08.2026</a:t>
             </a:fld>
             <a:endParaRPr lang="et-EE"/>
           </a:p>
@@ -37699,7 +37699,7 @@
             <p:ph sz="quarter" idx="10"/>
             <p:extLst>
               <p:ext uri="{D42A27DB-BD31-4B8C-83A1-F6EECF244321}">
-                <p14:modId xmlns:p14="http://schemas.microsoft.com/office/powerpoint/2010/main" val="578815032"/>
+                <p14:modId xmlns:p14="http://schemas.microsoft.com/office/powerpoint/2010/main" val="1633252050"/>
               </p:ext>
             </p:extLst>
           </p:nvPr>
@@ -38179,22 +38179,25 @@
                           <a:effectLst/>
                           <a:latin typeface="Inter"/>
                         </a:rPr>
-                        <a:t>13:15 – 15:15 – Koolitus – Kristina </a:t>
+                        <a:t>13:15 – 15:15 – Koolitus – </a:t>
                       </a:r>
                       <a:r>
-                        <a:rPr lang="et-EE" sz="2400" dirty="0"/>
-                        <a:t>Korobova </a:t>
-                      </a:r>
-                      <a:r>
-                        <a:rPr lang="en-US" sz="2400" b="0" i="0" dirty="0">
+                        <a:rPr lang="et-EE" sz="2400" b="0" i="0" dirty="0">
                           <a:solidFill>
                             <a:srgbClr val="121212"/>
                           </a:solidFill>
                           <a:effectLst/>
                           <a:latin typeface="Inter"/>
                         </a:rPr>
-                        <a:t>(Bolt)</a:t>
+                        <a:t>Versioonihaldus</a:t>
                       </a:r>
+                      <a:endParaRPr lang="en-US" sz="2400" b="0" i="0" dirty="0">
+                        <a:solidFill>
+                          <a:srgbClr val="121212"/>
+                        </a:solidFill>
+                        <a:effectLst/>
+                        <a:latin typeface="Inter"/>
+                      </a:endParaRPr>
                     </a:p>
                   </a:txBody>
                   <a:tcPr marL="99060" marR="99060" marT="49530" marB="49530" anchor="ctr">
@@ -38953,7 +38956,10 @@
           <a:bodyPr/>
           <a:lstStyle/>
           <a:p>
-            <a:endParaRPr lang="et-EE"/>
+            <a:r>
+              <a:rPr lang="et-EE" dirty="0"/>
+              <a:t>Versioonihaldus</a:t>
+            </a:r>
           </a:p>
         </p:txBody>
       </p:sp>
@@ -38982,8 +38988,26 @@
               <a:buNone/>
             </a:pPr>
             <a:r>
-              <a:rPr lang="en-US" sz="3200" dirty="0" err="1"/>
-              <a:t>Külalisesineja</a:t>
+              <a:rPr lang="et-EE" sz="3200" dirty="0"/>
+              <a:t>Loome oma kontod ja repositooriumid</a:t>
+            </a:r>
+          </a:p>
+          <a:p>
+            <a:pPr marL="0" indent="0">
+              <a:buNone/>
+            </a:pPr>
+            <a:r>
+              <a:rPr lang="et-EE" sz="3200" dirty="0"/>
+              <a:t>Jagame grupitöö liikmetega või teeme avalikuks (kui on lubatud)</a:t>
+            </a:r>
+          </a:p>
+          <a:p>
+            <a:pPr marL="0" indent="0">
+              <a:buNone/>
+            </a:pPr>
+            <a:r>
+              <a:rPr lang="et-EE" sz="3200"/>
+              <a:t>Lisame failid ja seome kohalike ketastega (Github desktop)</a:t>
             </a:r>
             <a:endParaRPr lang="et-EE" sz="3200" dirty="0"/>
           </a:p>
@@ -48967,21 +48991,12 @@
 </file>
 
 <file path=customXml/item1.xml><?xml version="1.0" encoding="utf-8"?>
-<?mso-contentType ?>
-<FormTemplates xmlns="http://schemas.microsoft.com/sharepoint/v3/contenttype/forms">
-  <Display>DocumentLibraryForm</Display>
-  <Edit>DocumentLibraryForm</Edit>
-  <New>DocumentLibraryForm</New>
-</FormTemplates>
-</file>
-
-<file path=customXml/item2.xml><?xml version="1.0" encoding="utf-8"?>
 <p:properties xmlns:p="http://schemas.microsoft.com/office/2006/metadata/properties" xmlns:xsi="http://www.w3.org/2001/XMLSchema-instance" xmlns:pc="http://schemas.microsoft.com/office/infopath/2007/PartnerControls">
   <documentManagement/>
 </p:properties>
 </file>
 
-<file path=customXml/item3.xml><?xml version="1.0" encoding="utf-8"?>
+<file path=customXml/item2.xml><?xml version="1.0" encoding="utf-8"?>
 <ct:contentTypeSchema xmlns:ct="http://schemas.microsoft.com/office/2006/metadata/contentType" xmlns:ma="http://schemas.microsoft.com/office/2006/metadata/properties/metaAttributes" ct:_="" ma:_="" ma:contentTypeName="Document" ma:contentTypeID="0x010100C4D27B8FA8976546BCD79313C588588D" ma:contentTypeVersion="8" ma:contentTypeDescription="Create a new document." ma:contentTypeScope="" ma:versionID="a112c56f6fe148a79025c76584832af0">
   <xsd:schema xmlns:xsd="http://www.w3.org/2001/XMLSchema" xmlns:xs="http://www.w3.org/2001/XMLSchema" xmlns:p="http://schemas.microsoft.com/office/2006/metadata/properties" xmlns:ns2="a1a2d923-8fea-42f1-bd41-9cdfff65694e" targetNamespace="http://schemas.microsoft.com/office/2006/metadata/properties" ma:root="true" ma:fieldsID="97c8655d467eaa9470a714421e7268c0" ns2:_="">
     <xsd:import namespace="a1a2d923-8fea-42f1-bd41-9cdfff65694e"/>
@@ -49149,15 +49164,16 @@
 </ct:contentTypeSchema>
 </file>
 
-<file path=customXml/itemProps1.xml><?xml version="1.0" encoding="utf-8"?>
-<ds:datastoreItem xmlns:ds="http://schemas.openxmlformats.org/officeDocument/2006/customXml" ds:itemID="{9DC439CA-6F1C-4005-ACA6-A52E04DEE0A7}">
-  <ds:schemaRefs>
-    <ds:schemaRef ds:uri="http://schemas.microsoft.com/sharepoint/v3/contenttype/forms"/>
-  </ds:schemaRefs>
-</ds:datastoreItem>
+<file path=customXml/item3.xml><?xml version="1.0" encoding="utf-8"?>
+<?mso-contentType ?>
+<FormTemplates xmlns="http://schemas.microsoft.com/sharepoint/v3/contenttype/forms">
+  <Display>DocumentLibraryForm</Display>
+  <Edit>DocumentLibraryForm</Edit>
+  <New>DocumentLibraryForm</New>
+</FormTemplates>
 </file>
 
-<file path=customXml/itemProps2.xml><?xml version="1.0" encoding="utf-8"?>
+<file path=customXml/itemProps1.xml><?xml version="1.0" encoding="utf-8"?>
 <ds:datastoreItem xmlns:ds="http://schemas.openxmlformats.org/officeDocument/2006/customXml" ds:itemID="{5BDF4908-A52A-47DD-A794-6E02D71942FC}">
   <ds:schemaRefs>
     <ds:schemaRef ds:uri="http://schemas.microsoft.com/office/2006/metadata/properties"/>
@@ -49166,7 +49182,7 @@
 </ds:datastoreItem>
 </file>
 
-<file path=customXml/itemProps3.xml><?xml version="1.0" encoding="utf-8"?>
+<file path=customXml/itemProps2.xml><?xml version="1.0" encoding="utf-8"?>
 <ds:datastoreItem xmlns:ds="http://schemas.openxmlformats.org/officeDocument/2006/customXml" ds:itemID="{9CF4F972-2392-44D0-AA45-41AC4FDC4A59}">
   <ds:schemaRefs>
     <ds:schemaRef ds:uri="a1a2d923-8fea-42f1-bd41-9cdfff65694e"/>
@@ -49182,4 +49198,12 @@
     <ds:schemaRef ds:uri="http://www.w3.org/2001/XMLSchema"/>
   </ds:schemaRefs>
 </ds:datastoreItem>
+</file>
+
+<file path=customXml/itemProps3.xml><?xml version="1.0" encoding="utf-8"?>
+<ds:datastoreItem xmlns:ds="http://schemas.openxmlformats.org/officeDocument/2006/customXml" ds:itemID="{9DC439CA-6F1C-4005-ACA6-A52E04DEE0A7}">
+  <ds:schemaRefs>
+    <ds:schemaRef ds:uri="http://schemas.microsoft.com/sharepoint/v3/contenttype/forms"/>
+  </ds:schemaRefs>
+</ds:datastoreItem>
 </file>
--- a/Materjalid/Day10 Andmekaitse/10-paev-andmetarkus-esitlus.pptx
+++ b/Materjalid/Day10 Andmekaitse/10-paev-andmetarkus-esitlus.pptx
@@ -5,10 +5,10 @@
     <p:sldMasterId id="2147483648" r:id="rId4"/>
   </p:sldMasterIdLst>
   <p:notesMasterIdLst>
-    <p:notesMasterId r:id="rId35"/>
+    <p:notesMasterId r:id="rId36"/>
   </p:notesMasterIdLst>
   <p:handoutMasterIdLst>
-    <p:handoutMasterId r:id="rId36"/>
+    <p:handoutMasterId r:id="rId37"/>
   </p:handoutMasterIdLst>
   <p:sldIdLst>
     <p:sldId id="417" r:id="rId5"/>
@@ -32,41 +32,42 @@
     <p:sldId id="569" r:id="rId23"/>
     <p:sldId id="577" r:id="rId24"/>
     <p:sldId id="668" r:id="rId25"/>
-    <p:sldId id="568" r:id="rId26"/>
-    <p:sldId id="647" r:id="rId27"/>
-    <p:sldId id="649" r:id="rId28"/>
-    <p:sldId id="651" r:id="rId29"/>
-    <p:sldId id="667" r:id="rId30"/>
-    <p:sldId id="574" r:id="rId31"/>
-    <p:sldId id="645" r:id="rId32"/>
-    <p:sldId id="538" r:id="rId33"/>
-    <p:sldId id="650" r:id="rId34"/>
+    <p:sldId id="669" r:id="rId26"/>
+    <p:sldId id="568" r:id="rId27"/>
+    <p:sldId id="647" r:id="rId28"/>
+    <p:sldId id="649" r:id="rId29"/>
+    <p:sldId id="651" r:id="rId30"/>
+    <p:sldId id="667" r:id="rId31"/>
+    <p:sldId id="574" r:id="rId32"/>
+    <p:sldId id="645" r:id="rId33"/>
+    <p:sldId id="538" r:id="rId34"/>
+    <p:sldId id="650" r:id="rId35"/>
   </p:sldIdLst>
   <p:sldSz cx="12192000" cy="6858000"/>
   <p:notesSz cx="6858000" cy="9144000"/>
   <p:embeddedFontLst>
     <p:embeddedFont>
       <p:font typeface="Inter" panose="020B0604020202020204" charset="0"/>
-      <p:regular r:id="rId37"/>
-      <p:bold r:id="rId38"/>
-      <p:italic r:id="rId39"/>
-      <p:boldItalic r:id="rId40"/>
+      <p:regular r:id="rId38"/>
+      <p:bold r:id="rId39"/>
+      <p:italic r:id="rId40"/>
+      <p:boldItalic r:id="rId41"/>
     </p:embeddedFont>
     <p:embeddedFont>
       <p:font typeface="Inter Bold" panose="020B0604020202020204" charset="0"/>
-      <p:bold r:id="rId41"/>
+      <p:bold r:id="rId42"/>
     </p:embeddedFont>
     <p:embeddedFont>
       <p:font typeface="Noto Serif" panose="02020600060500020200" pitchFamily="18" charset="0"/>
-      <p:regular r:id="rId42"/>
-      <p:bold r:id="rId43"/>
-      <p:italic r:id="rId44"/>
-      <p:boldItalic r:id="rId45"/>
+      <p:regular r:id="rId43"/>
+      <p:bold r:id="rId44"/>
+      <p:italic r:id="rId45"/>
+      <p:boldItalic r:id="rId46"/>
     </p:embeddedFont>
     <p:embeddedFont>
-      <p:font typeface="Poppins SemiBold" panose="00000700000000000000" pitchFamily="2" charset="-70"/>
-      <p:bold r:id="rId46"/>
-      <p:boldItalic r:id="rId47"/>
+      <p:font typeface="Poppins SemiBold" panose="00000700000000000000" pitchFamily="2" charset="0"/>
+      <p:bold r:id="rId47"/>
+      <p:boldItalic r:id="rId48"/>
     </p:embeddedFont>
   </p:embeddedFontLst>
   <p:defaultTextStyle>
@@ -306,7 +307,7 @@
           <a:p>
             <a:fld id="{F9D2AD6E-DEDD-49A0-A4BE-7A081A9112DA}" type="datetimeFigureOut">
               <a:rPr lang="en-US" smtClean="0"/>
-              <a:t>8/28/2026</a:t>
+              <a:t>9/4/2026</a:t>
             </a:fld>
             <a:endParaRPr lang="en-US"/>
           </a:p>
@@ -482,7 +483,7 @@
           </a:lstStyle>
           <a:p>
             <a:fld id="{2AF9C1A6-4321-41FA-B001-4140F0E2457F}" type="datetimeFigureOut">
-              <a:t>28.08.2026</a:t>
+              <a:t>9/4/2026</a:t>
             </a:fld>
             <a:endParaRPr lang="en-US"/>
           </a:p>
@@ -4353,7 +4354,7 @@
           <a:p>
             <a:fld id="{46699514-027B-49BD-8B49-5054CA40ECF4}" type="slidenum">
               <a:rPr lang="et-EE" smtClean="0"/>
-              <a:t>24</a:t>
+              <a:t>25</a:t>
             </a:fld>
             <a:endParaRPr lang="et-EE"/>
           </a:p>
@@ -4437,7 +4438,7 @@
           <a:p>
             <a:fld id="{46699514-027B-49BD-8B49-5054CA40ECF4}" type="slidenum">
               <a:rPr lang="et-EE" smtClean="0"/>
-              <a:t>25</a:t>
+              <a:t>26</a:t>
             </a:fld>
             <a:endParaRPr lang="et-EE"/>
           </a:p>
@@ -4740,7 +4741,7 @@
           <a:p>
             <a:fld id="{46699514-027B-49BD-8B49-5054CA40ECF4}" type="slidenum">
               <a:rPr lang="en-US"/>
-              <a:t>29</a:t>
+              <a:t>30</a:t>
             </a:fld>
             <a:endParaRPr lang="en-US"/>
           </a:p>
@@ -15886,7 +15887,7 @@
           <a:p>
             <a:fld id="{DE840A40-73C8-4048-8140-49F5D65BB431}" type="datetimeFigureOut">
               <a:rPr lang="et-EE" smtClean="0"/>
-              <a:t>28.08.2026</a:t>
+              <a:t>04.09.2026</a:t>
             </a:fld>
             <a:endParaRPr lang="et-EE"/>
           </a:p>
@@ -38806,6 +38807,588 @@
   <p:cSld>
     <p:spTree>
       <p:nvGrpSpPr>
+        <p:cNvPr id="1" name=""/>
+        <p:cNvGrpSpPr/>
+        <p:nvPr/>
+      </p:nvGrpSpPr>
+      <p:grpSpPr>
+        <a:xfrm>
+          <a:off x="0" y="0"/>
+          <a:ext cx="0" cy="0"/>
+          <a:chOff x="0" y="0"/>
+          <a:chExt cx="0" cy="0"/>
+        </a:xfrm>
+      </p:grpSpPr>
+      <p:sp>
+        <p:nvSpPr>
+          <p:cNvPr id="2" name="Title 1">
+            <a:extLst>
+              <a:ext uri="{FF2B5EF4-FFF2-40B4-BE49-F238E27FC236}">
+                <a16:creationId xmlns:a16="http://schemas.microsoft.com/office/drawing/2014/main" id="{AC8D531D-5CB6-CF8B-E43D-CA5EA6EEAF0D}"/>
+              </a:ext>
+            </a:extLst>
+          </p:cNvPr>
+          <p:cNvSpPr>
+            <a:spLocks noGrp="1"/>
+          </p:cNvSpPr>
+          <p:nvPr>
+            <p:ph type="ctrTitle"/>
+          </p:nvPr>
+        </p:nvSpPr>
+        <p:spPr/>
+        <p:txBody>
+          <a:bodyPr/>
+          <a:lstStyle/>
+          <a:p>
+            <a:r>
+              <a:rPr lang="en-GB" dirty="0"/>
+              <a:t>Power BI </a:t>
+            </a:r>
+            <a:r>
+              <a:rPr lang="en-GB" dirty="0" err="1"/>
+              <a:t>katsetamine</a:t>
+            </a:r>
+            <a:r>
+              <a:rPr lang="en-GB" dirty="0"/>
+              <a:t>: </a:t>
+            </a:r>
+            <a:r>
+              <a:rPr lang="en-GB" dirty="0" err="1"/>
+              <a:t>staatilised</a:t>
+            </a:r>
+            <a:r>
+              <a:rPr lang="en-GB" dirty="0"/>
+              <a:t> </a:t>
+            </a:r>
+            <a:r>
+              <a:rPr lang="en-GB" dirty="0" err="1"/>
+              <a:t>rollid</a:t>
+            </a:r>
+            <a:endParaRPr lang="en-GB" dirty="0"/>
+          </a:p>
+        </p:txBody>
+      </p:sp>
+      <p:sp>
+        <p:nvSpPr>
+          <p:cNvPr id="3" name="Content Placeholder 2">
+            <a:extLst>
+              <a:ext uri="{FF2B5EF4-FFF2-40B4-BE49-F238E27FC236}">
+                <a16:creationId xmlns:a16="http://schemas.microsoft.com/office/drawing/2014/main" id="{9E14E5A7-F68B-5C47-349E-F4031FDF8043}"/>
+              </a:ext>
+            </a:extLst>
+          </p:cNvPr>
+          <p:cNvSpPr>
+            <a:spLocks noGrp="1"/>
+          </p:cNvSpPr>
+          <p:nvPr>
+            <p:ph sz="quarter" idx="10"/>
+          </p:nvPr>
+        </p:nvSpPr>
+        <p:spPr>
+          <a:xfrm>
+            <a:off x="623888" y="1268413"/>
+            <a:ext cx="10824400" cy="4465637"/>
+          </a:xfrm>
+        </p:spPr>
+        <p:txBody>
+          <a:bodyPr/>
+          <a:lstStyle/>
+          <a:p>
+            <a:pPr lvl="0"/>
+            <a:r>
+              <a:rPr lang="en-GB" dirty="0"/>
+              <a:t>Ava Power BI </a:t>
+            </a:r>
+            <a:r>
+              <a:rPr lang="en-GB" dirty="0" err="1"/>
+              <a:t>Desktopis</a:t>
+            </a:r>
+            <a:r>
+              <a:rPr lang="en-GB" dirty="0"/>
+              <a:t> </a:t>
+            </a:r>
+            <a:r>
+              <a:rPr lang="en-GB" b="1" dirty="0" err="1"/>
+              <a:t>Modeling</a:t>
+            </a:r>
+            <a:r>
+              <a:rPr lang="en-GB" dirty="0"/>
+              <a:t> </a:t>
+            </a:r>
+            <a:r>
+              <a:rPr lang="en-GB" dirty="0" err="1"/>
+              <a:t>vahekaart</a:t>
+            </a:r>
+            <a:r>
+              <a:rPr lang="en-GB" dirty="0"/>
+              <a:t> </a:t>
+            </a:r>
+            <a:r>
+              <a:rPr lang="en-GB" dirty="0" err="1"/>
+              <a:t>ja</a:t>
+            </a:r>
+            <a:r>
+              <a:rPr lang="en-GB" dirty="0"/>
+              <a:t> vali </a:t>
+            </a:r>
+            <a:r>
+              <a:rPr lang="en-GB" b="1" dirty="0"/>
+              <a:t>Manage Roles</a:t>
+            </a:r>
+            <a:r>
+              <a:rPr lang="en-GB" dirty="0"/>
+              <a:t>.</a:t>
+            </a:r>
+          </a:p>
+          <a:p>
+            <a:pPr lvl="0"/>
+            <a:r>
+              <a:rPr lang="en-GB" dirty="0"/>
+              <a:t>Loo </a:t>
+            </a:r>
+            <a:r>
+              <a:rPr lang="en-GB" dirty="0" err="1"/>
+              <a:t>uus</a:t>
+            </a:r>
+            <a:r>
+              <a:rPr lang="en-GB" dirty="0"/>
+              <a:t> roll (</a:t>
+            </a:r>
+            <a:r>
+              <a:rPr lang="en-GB" dirty="0" err="1"/>
+              <a:t>nt</a:t>
+            </a:r>
+            <a:r>
+              <a:rPr lang="en-GB" dirty="0"/>
+              <a:t> </a:t>
+            </a:r>
+            <a:r>
+              <a:rPr lang="en-GB" i="1" dirty="0" err="1"/>
+              <a:t>Eesti_Tiim</a:t>
+            </a:r>
+            <a:r>
+              <a:rPr lang="en-GB" dirty="0"/>
+              <a:t>) </a:t>
+            </a:r>
+            <a:r>
+              <a:rPr lang="en-GB" dirty="0" err="1"/>
+              <a:t>ja</a:t>
+            </a:r>
+            <a:r>
+              <a:rPr lang="en-GB" dirty="0"/>
+              <a:t> </a:t>
+            </a:r>
+            <a:r>
+              <a:rPr lang="en-GB" dirty="0" err="1"/>
+              <a:t>kirjuta</a:t>
+            </a:r>
+            <a:r>
+              <a:rPr lang="en-GB" dirty="0"/>
+              <a:t> </a:t>
+            </a:r>
+            <a:r>
+              <a:rPr lang="en-GB" dirty="0" err="1"/>
+              <a:t>tabeli</a:t>
+            </a:r>
+            <a:r>
+              <a:rPr lang="en-GB" dirty="0"/>
+              <a:t> </a:t>
+            </a:r>
+            <a:r>
+              <a:rPr lang="en-GB" dirty="0" err="1"/>
+              <a:t>filtriks</a:t>
+            </a:r>
+            <a:r>
+              <a:rPr lang="en-GB" dirty="0"/>
+              <a:t>: Organizations[Name]= “</a:t>
+            </a:r>
+            <a:r>
+              <a:rPr lang="en-GB" dirty="0" err="1"/>
+              <a:t>Transpordiamet</a:t>
+            </a:r>
+            <a:r>
+              <a:rPr lang="en-GB" dirty="0"/>
+              <a:t>". </a:t>
+            </a:r>
+            <a:r>
+              <a:rPr lang="en-GB" dirty="0" err="1"/>
+              <a:t>Salvesta</a:t>
+            </a:r>
+            <a:r>
+              <a:rPr lang="en-GB" dirty="0"/>
+              <a:t>.</a:t>
+            </a:r>
+          </a:p>
+          <a:p>
+            <a:pPr lvl="0"/>
+            <a:r>
+              <a:rPr lang="en-GB" dirty="0" err="1"/>
+              <a:t>Klõpsa</a:t>
+            </a:r>
+            <a:r>
+              <a:rPr lang="en-GB" dirty="0"/>
+              <a:t> </a:t>
+            </a:r>
+            <a:r>
+              <a:rPr lang="en-GB" b="1" dirty="0" err="1"/>
+              <a:t>Modeling</a:t>
+            </a:r>
+            <a:r>
+              <a:rPr lang="en-GB" dirty="0"/>
+              <a:t> </a:t>
+            </a:r>
+            <a:r>
+              <a:rPr lang="en-GB" dirty="0" err="1"/>
+              <a:t>vahekaardil</a:t>
+            </a:r>
+            <a:r>
+              <a:rPr lang="en-GB" dirty="0"/>
+              <a:t> </a:t>
+            </a:r>
+            <a:r>
+              <a:rPr lang="en-GB" dirty="0" err="1"/>
+              <a:t>nuppu</a:t>
+            </a:r>
+            <a:r>
+              <a:rPr lang="en-GB" dirty="0"/>
+              <a:t> </a:t>
+            </a:r>
+            <a:r>
+              <a:rPr lang="en-GB" b="1" dirty="0"/>
+              <a:t>View as</a:t>
+            </a:r>
+            <a:r>
+              <a:rPr lang="en-GB" dirty="0"/>
+              <a:t>.</a:t>
+            </a:r>
+          </a:p>
+          <a:p>
+            <a:pPr lvl="0"/>
+            <a:r>
+              <a:rPr lang="en-GB" dirty="0" err="1"/>
+              <a:t>Avanenud</a:t>
+            </a:r>
+            <a:r>
+              <a:rPr lang="en-GB" dirty="0"/>
+              <a:t> </a:t>
+            </a:r>
+            <a:r>
+              <a:rPr lang="en-GB" dirty="0" err="1"/>
+              <a:t>aknas</a:t>
+            </a:r>
+            <a:r>
+              <a:rPr lang="en-GB" dirty="0"/>
+              <a:t> tee </a:t>
+            </a:r>
+            <a:r>
+              <a:rPr lang="en-GB" dirty="0" err="1"/>
+              <a:t>linnuke</a:t>
+            </a:r>
+            <a:r>
+              <a:rPr lang="en-GB" dirty="0"/>
+              <a:t> </a:t>
+            </a:r>
+            <a:r>
+              <a:rPr lang="en-GB" dirty="0" err="1"/>
+              <a:t>oma</a:t>
+            </a:r>
+            <a:r>
+              <a:rPr lang="en-GB" dirty="0"/>
+              <a:t> </a:t>
+            </a:r>
+            <a:r>
+              <a:rPr lang="en-GB" dirty="0" err="1"/>
+              <a:t>loodud</a:t>
+            </a:r>
+            <a:r>
+              <a:rPr lang="en-GB" dirty="0"/>
+              <a:t> </a:t>
+            </a:r>
+            <a:r>
+              <a:rPr lang="en-GB" dirty="0" err="1"/>
+              <a:t>rolli</a:t>
+            </a:r>
+            <a:r>
+              <a:rPr lang="en-GB" dirty="0"/>
+              <a:t> (</a:t>
+            </a:r>
+            <a:r>
+              <a:rPr lang="en-GB" i="1" dirty="0" err="1"/>
+              <a:t>Eesti_Tiim</a:t>
+            </a:r>
+            <a:r>
+              <a:rPr lang="en-GB" dirty="0"/>
+              <a:t>) </a:t>
+            </a:r>
+            <a:r>
+              <a:rPr lang="en-GB" dirty="0" err="1"/>
+              <a:t>ette</a:t>
+            </a:r>
+            <a:r>
+              <a:rPr lang="en-GB" dirty="0"/>
+              <a:t> </a:t>
+            </a:r>
+            <a:r>
+              <a:rPr lang="en-GB" dirty="0" err="1"/>
+              <a:t>ja</a:t>
+            </a:r>
+            <a:r>
+              <a:rPr lang="en-GB" dirty="0"/>
+              <a:t> </a:t>
+            </a:r>
+            <a:r>
+              <a:rPr lang="en-GB" dirty="0" err="1"/>
+              <a:t>vajuta</a:t>
+            </a:r>
+            <a:r>
+              <a:rPr lang="en-GB" dirty="0"/>
+              <a:t> OK.</a:t>
+            </a:r>
+          </a:p>
+          <a:p>
+            <a:pPr lvl="0"/>
+            <a:r>
+              <a:rPr lang="en-GB" b="1" dirty="0" err="1"/>
+              <a:t>Tulemus</a:t>
+            </a:r>
+            <a:r>
+              <a:rPr lang="en-GB" b="1" dirty="0"/>
+              <a:t>:</a:t>
+            </a:r>
+            <a:r>
+              <a:rPr lang="en-GB" dirty="0"/>
+              <a:t> Sinu </a:t>
+            </a:r>
+            <a:r>
+              <a:rPr lang="en-GB" dirty="0" err="1"/>
+              <a:t>raporti</a:t>
+            </a:r>
+            <a:r>
+              <a:rPr lang="en-GB" dirty="0"/>
+              <a:t> </a:t>
+            </a:r>
+            <a:r>
+              <a:rPr lang="en-GB" dirty="0" err="1"/>
+              <a:t>kohale</a:t>
+            </a:r>
+            <a:r>
+              <a:rPr lang="en-GB" dirty="0"/>
+              <a:t> </a:t>
+            </a:r>
+            <a:r>
+              <a:rPr lang="en-GB" dirty="0" err="1"/>
+              <a:t>ilmub</a:t>
+            </a:r>
+            <a:r>
+              <a:rPr lang="en-GB" dirty="0"/>
+              <a:t> </a:t>
+            </a:r>
+            <a:r>
+              <a:rPr lang="en-GB" dirty="0" err="1"/>
+              <a:t>kollane</a:t>
+            </a:r>
+            <a:r>
+              <a:rPr lang="en-GB" dirty="0"/>
+              <a:t> </a:t>
+            </a:r>
+            <a:r>
+              <a:rPr lang="en-GB" dirty="0" err="1"/>
+              <a:t>riba</a:t>
+            </a:r>
+            <a:r>
+              <a:rPr lang="en-GB" dirty="0"/>
+              <a:t> </a:t>
+            </a:r>
+            <a:r>
+              <a:rPr lang="en-GB" dirty="0" err="1"/>
+              <a:t>teatega</a:t>
+            </a:r>
+            <a:r>
+              <a:rPr lang="en-GB" dirty="0"/>
+              <a:t>, et </a:t>
+            </a:r>
+            <a:r>
+              <a:rPr lang="en-GB" dirty="0" err="1"/>
+              <a:t>vaatad</a:t>
+            </a:r>
+            <a:r>
+              <a:rPr lang="en-GB" dirty="0"/>
+              <a:t> </a:t>
+            </a:r>
+            <a:r>
+              <a:rPr lang="en-GB" dirty="0" err="1"/>
+              <a:t>praegu</a:t>
+            </a:r>
+            <a:r>
+              <a:rPr lang="en-GB" dirty="0"/>
+              <a:t> </a:t>
+            </a:r>
+            <a:r>
+              <a:rPr lang="en-GB" dirty="0" err="1"/>
+              <a:t>andmeid</a:t>
+            </a:r>
+            <a:r>
+              <a:rPr lang="en-GB" dirty="0"/>
+              <a:t> </a:t>
+            </a:r>
+            <a:r>
+              <a:rPr lang="en-GB" dirty="0" err="1"/>
+              <a:t>konkreetse</a:t>
+            </a:r>
+            <a:r>
+              <a:rPr lang="en-GB" dirty="0"/>
+              <a:t> </a:t>
+            </a:r>
+            <a:r>
+              <a:rPr lang="en-GB" dirty="0" err="1"/>
+              <a:t>rollina</a:t>
+            </a:r>
+            <a:r>
+              <a:rPr lang="en-GB" dirty="0"/>
+              <a:t>. </a:t>
+            </a:r>
+            <a:r>
+              <a:rPr lang="en-GB" dirty="0" err="1"/>
+              <a:t>Kõik</a:t>
+            </a:r>
+            <a:r>
+              <a:rPr lang="en-GB" dirty="0"/>
+              <a:t> </a:t>
+            </a:r>
+            <a:r>
+              <a:rPr lang="en-GB" dirty="0" err="1"/>
+              <a:t>graafikud</a:t>
+            </a:r>
+            <a:r>
+              <a:rPr lang="en-GB" dirty="0"/>
+              <a:t> </a:t>
+            </a:r>
+            <a:r>
+              <a:rPr lang="en-GB" dirty="0" err="1"/>
+              <a:t>filtreeritakse</a:t>
+            </a:r>
+            <a:r>
+              <a:rPr lang="en-GB" dirty="0"/>
+              <a:t> </a:t>
+            </a:r>
+            <a:r>
+              <a:rPr lang="en-GB" dirty="0" err="1"/>
+              <a:t>kohe</a:t>
+            </a:r>
+            <a:r>
+              <a:rPr lang="en-GB" dirty="0"/>
+              <a:t> </a:t>
+            </a:r>
+            <a:r>
+              <a:rPr lang="en-GB" dirty="0" err="1"/>
+              <a:t>ja</a:t>
+            </a:r>
+            <a:r>
+              <a:rPr lang="en-GB" dirty="0"/>
+              <a:t> </a:t>
+            </a:r>
+            <a:r>
+              <a:rPr lang="en-GB" dirty="0" err="1"/>
+              <a:t>näitavad</a:t>
+            </a:r>
+            <a:r>
+              <a:rPr lang="en-GB" dirty="0"/>
+              <a:t> </a:t>
+            </a:r>
+            <a:r>
+              <a:rPr lang="en-GB" dirty="0" err="1"/>
+              <a:t>ainult</a:t>
+            </a:r>
+            <a:r>
+              <a:rPr lang="en-GB" dirty="0"/>
+              <a:t> Eesti </a:t>
+            </a:r>
+            <a:r>
+              <a:rPr lang="en-GB" dirty="0" err="1"/>
+              <a:t>andmeid</a:t>
+            </a:r>
+            <a:r>
+              <a:rPr lang="en-GB" dirty="0"/>
+              <a:t>.</a:t>
+            </a:r>
+          </a:p>
+          <a:p>
+            <a:pPr lvl="0"/>
+            <a:endParaRPr lang="en-GB" dirty="0"/>
+          </a:p>
+          <a:p>
+            <a:pPr lvl="0"/>
+            <a:r>
+              <a:rPr lang="en-GB" dirty="0"/>
+              <a:t>Power BI service alt </a:t>
+            </a:r>
+            <a:r>
+              <a:rPr lang="en-GB" dirty="0" err="1"/>
+              <a:t>määratakse</a:t>
+            </a:r>
+            <a:r>
+              <a:rPr lang="en-GB" dirty="0"/>
+              <a:t> </a:t>
+            </a:r>
+            <a:r>
+              <a:rPr lang="en-GB" dirty="0" err="1"/>
+              <a:t>inimesed</a:t>
+            </a:r>
+            <a:r>
+              <a:rPr lang="en-GB" dirty="0"/>
+              <a:t> </a:t>
+            </a:r>
+            <a:r>
+              <a:rPr lang="en-GB" dirty="0" err="1"/>
+              <a:t>sellesse</a:t>
+            </a:r>
+            <a:r>
+              <a:rPr lang="en-GB" dirty="0"/>
+              <a:t> </a:t>
+            </a:r>
+            <a:r>
+              <a:rPr lang="en-GB" dirty="0" err="1"/>
+              <a:t>rolli</a:t>
+            </a:r>
+            <a:r>
+              <a:rPr lang="en-GB" dirty="0"/>
+              <a:t>.</a:t>
+            </a:r>
+            <a:br>
+              <a:rPr lang="en-GB" dirty="0"/>
+            </a:br>
+            <a:r>
+              <a:rPr lang="en-GB" dirty="0" err="1"/>
+              <a:t>Nt</a:t>
+            </a:r>
+            <a:r>
+              <a:rPr lang="en-GB" dirty="0"/>
+              <a:t> </a:t>
+            </a:r>
+          </a:p>
+          <a:p>
+            <a:endParaRPr lang="en-GB" dirty="0"/>
+          </a:p>
+        </p:txBody>
+      </p:sp>
+    </p:spTree>
+    <p:extLst>
+      <p:ext uri="{BB962C8B-B14F-4D97-AF65-F5344CB8AC3E}">
+        <p14:creationId xmlns:p14="http://schemas.microsoft.com/office/powerpoint/2010/main" val="3229165278"/>
+      </p:ext>
+    </p:extLst>
+  </p:cSld>
+  <p:clrMapOvr>
+    <a:masterClrMapping/>
+  </p:clrMapOvr>
+</p:sld>
+</file>
+
+<file path=ppt/slides/slide23.xml><?xml version="1.0" encoding="utf-8"?>
+<p:sld xmlns:a="http://schemas.openxmlformats.org/drawingml/2006/main" xmlns:r="http://schemas.openxmlformats.org/officeDocument/2006/relationships" xmlns:p="http://schemas.openxmlformats.org/presentationml/2006/main">
+  <p:cSld>
+    <p:spTree>
+      <p:nvGrpSpPr>
         <p:cNvPr id="1" name="">
           <a:extLst>
             <a:ext uri="{FF2B5EF4-FFF2-40B4-BE49-F238E27FC236}">
@@ -38918,7 +39501,7 @@
 </p:sld>
 </file>
 
-<file path=ppt/slides/slide23.xml><?xml version="1.0" encoding="utf-8"?>
+<file path=ppt/slides/slide24.xml><?xml version="1.0" encoding="utf-8"?>
 <p:sld xmlns:a="http://schemas.openxmlformats.org/drawingml/2006/main" xmlns:r="http://schemas.openxmlformats.org/officeDocument/2006/relationships" xmlns:p="http://schemas.openxmlformats.org/presentationml/2006/main">
   <p:cSld>
     <p:spTree>
@@ -39026,7 +39609,7 @@
 </p:sld>
 </file>
 
-<file path=ppt/slides/slide24.xml><?xml version="1.0" encoding="utf-8"?>
+<file path=ppt/slides/slide25.xml><?xml version="1.0" encoding="utf-8"?>
 <p:sld xmlns:a="http://schemas.openxmlformats.org/drawingml/2006/main" xmlns:r="http://schemas.openxmlformats.org/officeDocument/2006/relationships" xmlns:p="http://schemas.openxmlformats.org/presentationml/2006/main">
   <p:cSld>
     <p:spTree>
@@ -39139,7 +39722,7 @@
 </p:sld>
 </file>
 
-<file path=ppt/slides/slide25.xml><?xml version="1.0" encoding="utf-8"?>
+<file path=ppt/slides/slide26.xml><?xml version="1.0" encoding="utf-8"?>
 <p:sld xmlns:a="http://schemas.openxmlformats.org/drawingml/2006/main" xmlns:r="http://schemas.openxmlformats.org/officeDocument/2006/relationships" xmlns:p="http://schemas.openxmlformats.org/presentationml/2006/main">
   <p:cSld>
     <p:spTree>
@@ -39248,7 +39831,7 @@
 </p:sld>
 </file>
 
-<file path=ppt/slides/slide26.xml><?xml version="1.0" encoding="utf-8"?>
+<file path=ppt/slides/slide27.xml><?xml version="1.0" encoding="utf-8"?>
 <p:sld xmlns:a="http://schemas.openxmlformats.org/drawingml/2006/main" xmlns:r="http://schemas.openxmlformats.org/officeDocument/2006/relationships" xmlns:p="http://schemas.openxmlformats.org/presentationml/2006/main">
   <p:cSld>
     <p:spTree>
@@ -39371,7 +39954,7 @@
 </p:sld>
 </file>
 
-<file path=ppt/slides/slide27.xml><?xml version="1.0" encoding="utf-8"?>
+<file path=ppt/slides/slide28.xml><?xml version="1.0" encoding="utf-8"?>
 <p:sld xmlns:a="http://schemas.openxmlformats.org/drawingml/2006/main" xmlns:r="http://schemas.openxmlformats.org/officeDocument/2006/relationships" xmlns:p="http://schemas.openxmlformats.org/presentationml/2006/main">
   <p:cSld>
     <p:spTree>
@@ -40031,7 +40614,7 @@
 </p:sld>
 </file>
 
-<file path=ppt/slides/slide28.xml><?xml version="1.0" encoding="utf-8"?>
+<file path=ppt/slides/slide29.xml><?xml version="1.0" encoding="utf-8"?>
 <p:sld xmlns:a="http://schemas.openxmlformats.org/drawingml/2006/main" xmlns:r="http://schemas.openxmlformats.org/officeDocument/2006/relationships" xmlns:p="http://schemas.openxmlformats.org/presentationml/2006/main">
   <p:cSld>
     <p:spTree>
@@ -40741,7 +41324,1421 @@
 </p:sld>
 </file>
 
-<file path=ppt/slides/slide29.xml><?xml version="1.0" encoding="utf-8"?>
+<file path=ppt/slides/slide3.xml><?xml version="1.0" encoding="utf-8"?>
+<p:sld xmlns:a="http://schemas.openxmlformats.org/drawingml/2006/main" xmlns:r="http://schemas.openxmlformats.org/officeDocument/2006/relationships" xmlns:p="http://schemas.openxmlformats.org/presentationml/2006/main">
+  <p:cSld>
+    <p:spTree>
+      <p:nvGrpSpPr>
+        <p:cNvPr id="1" name="">
+          <a:extLst>
+            <a:ext uri="{FF2B5EF4-FFF2-40B4-BE49-F238E27FC236}">
+              <a16:creationId xmlns:a16="http://schemas.microsoft.com/office/drawing/2014/main" id="{ED2228FF-8F2E-5210-1E51-C5B71DFE1BF5}"/>
+            </a:ext>
+          </a:extLst>
+        </p:cNvPr>
+        <p:cNvGrpSpPr/>
+        <p:nvPr/>
+      </p:nvGrpSpPr>
+      <p:grpSpPr>
+        <a:xfrm>
+          <a:off x="0" y="0"/>
+          <a:ext cx="0" cy="0"/>
+          <a:chOff x="0" y="0"/>
+          <a:chExt cx="0" cy="0"/>
+        </a:xfrm>
+      </p:grpSpPr>
+      <p:sp>
+        <p:nvSpPr>
+          <p:cNvPr id="2" name="Title 1">
+            <a:extLst>
+              <a:ext uri="{FF2B5EF4-FFF2-40B4-BE49-F238E27FC236}">
+                <a16:creationId xmlns:a16="http://schemas.microsoft.com/office/drawing/2014/main" id="{917D2EE0-DAF0-D014-1B9C-E5A2B2D5174F}"/>
+              </a:ext>
+            </a:extLst>
+          </p:cNvPr>
+          <p:cNvSpPr>
+            <a:spLocks noGrp="1"/>
+          </p:cNvSpPr>
+          <p:nvPr>
+            <p:ph type="ctrTitle"/>
+          </p:nvPr>
+        </p:nvSpPr>
+        <p:spPr/>
+        <p:txBody>
+          <a:bodyPr/>
+          <a:lstStyle/>
+          <a:p>
+            <a:r>
+              <a:rPr lang="en-US" sz="3600" b="1" err="1"/>
+              <a:t>Andmekaitse</a:t>
+            </a:r>
+            <a:endParaRPr lang="en-US" err="1"/>
+          </a:p>
+        </p:txBody>
+      </p:sp>
+      <p:sp>
+        <p:nvSpPr>
+          <p:cNvPr id="3" name="Content Placeholder 2">
+            <a:extLst>
+              <a:ext uri="{FF2B5EF4-FFF2-40B4-BE49-F238E27FC236}">
+                <a16:creationId xmlns:a16="http://schemas.microsoft.com/office/drawing/2014/main" id="{EA490F2F-9A95-2356-2F41-6D1F85E5FA20}"/>
+              </a:ext>
+            </a:extLst>
+          </p:cNvPr>
+          <p:cNvSpPr>
+            <a:spLocks noGrp="1"/>
+          </p:cNvSpPr>
+          <p:nvPr>
+            <p:ph sz="quarter" idx="10"/>
+          </p:nvPr>
+        </p:nvSpPr>
+        <p:spPr/>
+        <p:txBody>
+          <a:bodyPr/>
+          <a:lstStyle/>
+          <a:p>
+            <a:pPr marL="342900" indent="-342900">
+              <a:lnSpc>
+                <a:spcPct val="150000"/>
+              </a:lnSpc>
+              <a:buFont typeface="Arial" panose="020B0502030000000004" pitchFamily="34" charset="0"/>
+              <a:buChar char="•"/>
+            </a:pPr>
+            <a:r>
+              <a:rPr lang="en-US" sz="2000" dirty="0" err="1">
+                <a:ea typeface="Inter"/>
+                <a:cs typeface="Arial"/>
+              </a:rPr>
+              <a:t>Andmesubjekt</a:t>
+            </a:r>
+            <a:r>
+              <a:rPr lang="en-US" sz="2000" dirty="0">
+                <a:ea typeface="Inter"/>
+                <a:cs typeface="Arial"/>
+              </a:rPr>
+              <a:t> </a:t>
+            </a:r>
+            <a:r>
+              <a:rPr lang="en-US" sz="2000" dirty="0" err="1">
+                <a:ea typeface="Inter"/>
+                <a:cs typeface="Arial"/>
+              </a:rPr>
+              <a:t>peab</a:t>
+            </a:r>
+            <a:r>
+              <a:rPr lang="en-US" sz="2000" dirty="0">
+                <a:ea typeface="Inter"/>
+                <a:cs typeface="Arial"/>
+              </a:rPr>
+              <a:t> </a:t>
+            </a:r>
+            <a:r>
+              <a:rPr lang="en-US" sz="2000" dirty="0" err="1">
+                <a:ea typeface="Inter"/>
+                <a:cs typeface="Arial"/>
+              </a:rPr>
+              <a:t>teadma</a:t>
+            </a:r>
+            <a:r>
+              <a:rPr lang="en-US" sz="2000" dirty="0">
+                <a:ea typeface="Inter"/>
+                <a:cs typeface="Arial"/>
+              </a:rPr>
+              <a:t>, mis </a:t>
+            </a:r>
+            <a:r>
+              <a:rPr lang="en-US" sz="2000" dirty="0" err="1">
+                <a:ea typeface="Inter"/>
+                <a:cs typeface="Arial"/>
+              </a:rPr>
+              <a:t>andmeid</a:t>
+            </a:r>
+            <a:r>
+              <a:rPr lang="en-US" sz="2000" dirty="0">
+                <a:ea typeface="Inter"/>
+                <a:cs typeface="Arial"/>
+              </a:rPr>
+              <a:t>, mis </a:t>
+            </a:r>
+            <a:r>
+              <a:rPr lang="en-US" sz="2000" dirty="0" err="1">
+                <a:ea typeface="Inter"/>
+                <a:cs typeface="Arial"/>
+              </a:rPr>
+              <a:t>eesmärgiga</a:t>
+            </a:r>
+            <a:r>
+              <a:rPr lang="en-US" sz="2000" dirty="0">
+                <a:ea typeface="Inter"/>
+                <a:cs typeface="Arial"/>
+              </a:rPr>
+              <a:t> ja </a:t>
+            </a:r>
+            <a:r>
+              <a:rPr lang="en-US" sz="2000" dirty="0" err="1">
+                <a:ea typeface="Inter"/>
+                <a:cs typeface="Arial"/>
+              </a:rPr>
+              <a:t>kui</a:t>
+            </a:r>
+            <a:r>
+              <a:rPr lang="en-US" sz="2000" dirty="0">
+                <a:ea typeface="Inter"/>
+                <a:cs typeface="Arial"/>
+              </a:rPr>
+              <a:t> </a:t>
+            </a:r>
+            <a:r>
+              <a:rPr lang="en-US" sz="2000" dirty="0" err="1">
+                <a:ea typeface="Inter"/>
+                <a:cs typeface="Arial"/>
+              </a:rPr>
+              <a:t>kaua</a:t>
+            </a:r>
+            <a:r>
+              <a:rPr lang="en-US" sz="2000" dirty="0">
+                <a:ea typeface="Inter"/>
+                <a:cs typeface="Arial"/>
+              </a:rPr>
+              <a:t> </a:t>
+            </a:r>
+            <a:r>
+              <a:rPr lang="en-US" sz="2000" dirty="0" err="1">
+                <a:ea typeface="Inter"/>
+                <a:cs typeface="Arial"/>
+              </a:rPr>
+              <a:t>kogutakse</a:t>
+            </a:r>
+            <a:r>
+              <a:rPr lang="en-US" sz="2000" dirty="0">
+                <a:ea typeface="Inter"/>
+                <a:cs typeface="Arial"/>
+              </a:rPr>
+              <a:t>, </a:t>
+            </a:r>
+            <a:r>
+              <a:rPr lang="en-US" sz="2000" dirty="0" err="1">
+                <a:ea typeface="Inter"/>
+                <a:cs typeface="Arial"/>
+              </a:rPr>
+              <a:t>töödeldakse</a:t>
+            </a:r>
+            <a:r>
+              <a:rPr lang="en-US" sz="2000" dirty="0">
+                <a:ea typeface="Inter"/>
+                <a:cs typeface="Arial"/>
+              </a:rPr>
+              <a:t> (</a:t>
+            </a:r>
+            <a:r>
+              <a:rPr lang="en-US" sz="2000" dirty="0" err="1">
+                <a:ea typeface="Inter"/>
+                <a:cs typeface="Arial"/>
+              </a:rPr>
+              <a:t>sh</a:t>
+            </a:r>
+            <a:r>
+              <a:rPr lang="en-US" sz="2000" dirty="0">
+                <a:ea typeface="Inter"/>
+                <a:cs typeface="Arial"/>
+              </a:rPr>
+              <a:t> </a:t>
+            </a:r>
+            <a:r>
+              <a:rPr lang="en-US" sz="2000" dirty="0" err="1">
+                <a:ea typeface="Inter"/>
+                <a:cs typeface="Arial"/>
+              </a:rPr>
+              <a:t>vaadatakse</a:t>
+            </a:r>
+            <a:r>
+              <a:rPr lang="en-US" sz="2000" dirty="0">
+                <a:ea typeface="Inter"/>
+                <a:cs typeface="Arial"/>
+              </a:rPr>
+              <a:t>) ja </a:t>
+            </a:r>
+            <a:r>
+              <a:rPr lang="en-US" sz="2000" dirty="0" err="1">
+                <a:ea typeface="Inter"/>
+                <a:cs typeface="Arial"/>
+              </a:rPr>
+              <a:t>hoiustatakse</a:t>
+            </a:r>
+            <a:r>
+              <a:rPr lang="en-US" sz="2000" dirty="0">
+                <a:ea typeface="Inter"/>
+                <a:cs typeface="Arial"/>
+              </a:rPr>
+              <a:t>.</a:t>
+            </a:r>
+            <a:endParaRPr lang="en-US" sz="2000" dirty="0">
+              <a:cs typeface="Arial"/>
+            </a:endParaRPr>
+          </a:p>
+          <a:p>
+            <a:pPr marL="857250" lvl="1" indent="-342900">
+              <a:lnSpc>
+                <a:spcPct val="150000"/>
+              </a:lnSpc>
+              <a:buFont typeface="Courier New" panose="020B0502030000000004" pitchFamily="34" charset="0"/>
+              <a:buChar char="o"/>
+            </a:pPr>
+            <a:r>
+              <a:rPr lang="en-US" sz="2000" dirty="0" err="1">
+                <a:ea typeface="Inter"/>
+                <a:cs typeface="Arial"/>
+              </a:rPr>
+              <a:t>Andmesubjekt</a:t>
+            </a:r>
+            <a:r>
+              <a:rPr lang="en-US" sz="2000" dirty="0">
+                <a:ea typeface="Inter"/>
+                <a:cs typeface="Arial"/>
+              </a:rPr>
+              <a:t> - </a:t>
+            </a:r>
+            <a:r>
+              <a:rPr lang="en-US" sz="2000" dirty="0" err="1">
+                <a:ea typeface="Inter"/>
+                <a:cs typeface="Arial"/>
+              </a:rPr>
+              <a:t>füüsiline</a:t>
+            </a:r>
+            <a:r>
+              <a:rPr lang="en-US" sz="2000" dirty="0">
+                <a:ea typeface="Inter"/>
+                <a:cs typeface="Arial"/>
+              </a:rPr>
+              <a:t> </a:t>
+            </a:r>
+            <a:r>
+              <a:rPr lang="en-US" sz="2000" dirty="0" err="1">
+                <a:ea typeface="Inter"/>
+                <a:cs typeface="Arial"/>
+              </a:rPr>
+              <a:t>isik</a:t>
+            </a:r>
+            <a:r>
+              <a:rPr lang="en-US" sz="2000" dirty="0">
+                <a:ea typeface="Inter"/>
+                <a:cs typeface="Arial"/>
+              </a:rPr>
+              <a:t> </a:t>
+            </a:r>
+            <a:r>
+              <a:rPr lang="en-US" sz="2000" dirty="0" err="1">
+                <a:ea typeface="Inter"/>
+                <a:cs typeface="Arial"/>
+              </a:rPr>
+              <a:t>ehk</a:t>
+            </a:r>
+            <a:r>
+              <a:rPr lang="en-US" sz="2000" dirty="0">
+                <a:ea typeface="Inter"/>
+                <a:cs typeface="Arial"/>
+              </a:rPr>
+              <a:t> </a:t>
+            </a:r>
+            <a:r>
+              <a:rPr lang="en-US" sz="2000" dirty="0" err="1">
+                <a:ea typeface="Inter"/>
+                <a:cs typeface="Arial"/>
+              </a:rPr>
+              <a:t>inimene</a:t>
+            </a:r>
+            <a:r>
+              <a:rPr lang="en-US" sz="2000" dirty="0">
+                <a:ea typeface="Inter"/>
+                <a:cs typeface="Arial"/>
+              </a:rPr>
+              <a:t>, </a:t>
+            </a:r>
+            <a:r>
+              <a:rPr lang="en-US" sz="2000" dirty="0" err="1">
+                <a:ea typeface="Inter"/>
+                <a:cs typeface="Arial"/>
+              </a:rPr>
+              <a:t>kelle</a:t>
+            </a:r>
+            <a:r>
+              <a:rPr lang="en-US" sz="2000" dirty="0">
+                <a:ea typeface="Inter"/>
+                <a:cs typeface="Arial"/>
+              </a:rPr>
+              <a:t> </a:t>
+            </a:r>
+            <a:r>
+              <a:rPr lang="en-US" sz="2000" dirty="0" err="1">
+                <a:ea typeface="Inter"/>
+                <a:cs typeface="Arial"/>
+              </a:rPr>
+              <a:t>andmeid</a:t>
+            </a:r>
+            <a:r>
+              <a:rPr lang="en-US" sz="2000" dirty="0">
+                <a:ea typeface="Inter"/>
+                <a:cs typeface="Arial"/>
+              </a:rPr>
+              <a:t> </a:t>
+            </a:r>
+            <a:r>
+              <a:rPr lang="en-US" sz="2000" dirty="0" err="1">
+                <a:ea typeface="Inter"/>
+                <a:cs typeface="Arial"/>
+              </a:rPr>
+              <a:t>töödeldakse</a:t>
+            </a:r>
+            <a:r>
+              <a:rPr lang="en-US" sz="2000" dirty="0">
+                <a:ea typeface="Inter"/>
+                <a:cs typeface="Arial"/>
+              </a:rPr>
+              <a:t>.</a:t>
+            </a:r>
+            <a:endParaRPr lang="en-US" sz="2000" dirty="0">
+              <a:solidFill>
+                <a:srgbClr val="121212"/>
+              </a:solidFill>
+              <a:latin typeface="Inter"/>
+              <a:ea typeface="Inter"/>
+              <a:cs typeface="Arial"/>
+            </a:endParaRPr>
+          </a:p>
+          <a:p>
+            <a:pPr marL="342900" indent="-342900">
+              <a:lnSpc>
+                <a:spcPct val="150000"/>
+              </a:lnSpc>
+              <a:buFont typeface="Arial" panose="020B0502030000000004" pitchFamily="34" charset="0"/>
+              <a:buChar char="•"/>
+            </a:pPr>
+            <a:r>
+              <a:rPr lang="en-US" sz="2000" dirty="0" err="1">
+                <a:ea typeface="Inter"/>
+                <a:cs typeface="Arial"/>
+                <a:hlinkClick r:id="rId3"/>
+              </a:rPr>
+              <a:t>Isikuandmete</a:t>
+            </a:r>
+            <a:r>
+              <a:rPr lang="en-US" sz="2000" dirty="0">
+                <a:ea typeface="Inter"/>
+                <a:cs typeface="Arial"/>
+                <a:hlinkClick r:id="rId3"/>
+              </a:rPr>
+              <a:t> </a:t>
+            </a:r>
+            <a:r>
+              <a:rPr lang="en-US" sz="2000" dirty="0" err="1">
+                <a:ea typeface="Inter"/>
+                <a:cs typeface="Arial"/>
+                <a:hlinkClick r:id="rId3"/>
+              </a:rPr>
+              <a:t>üldkaitse</a:t>
+            </a:r>
+            <a:r>
+              <a:rPr lang="en-US" sz="2000" dirty="0">
+                <a:ea typeface="Inter"/>
+                <a:cs typeface="Arial"/>
+                <a:hlinkClick r:id="rId3"/>
+              </a:rPr>
+              <a:t> </a:t>
+            </a:r>
+            <a:r>
+              <a:rPr lang="en-US" sz="2000" dirty="0" err="1">
+                <a:ea typeface="Inter"/>
+                <a:cs typeface="Arial"/>
+                <a:hlinkClick r:id="rId3"/>
+              </a:rPr>
+              <a:t>määrus</a:t>
+            </a:r>
+            <a:r>
+              <a:rPr lang="en-US" sz="2000" dirty="0">
+                <a:ea typeface="Inter"/>
+                <a:cs typeface="Arial"/>
+                <a:hlinkClick r:id="rId3"/>
+              </a:rPr>
+              <a:t> (IKÜM)</a:t>
+            </a:r>
+            <a:endParaRPr lang="en-US" sz="2000" dirty="0">
+              <a:ea typeface="Inter"/>
+              <a:cs typeface="Arial"/>
+            </a:endParaRPr>
+          </a:p>
+          <a:p>
+            <a:pPr marL="857250" lvl="1" indent="-228600">
+              <a:lnSpc>
+                <a:spcPct val="150000"/>
+              </a:lnSpc>
+              <a:buFont typeface="Courier New" panose="020B0502030000000004" pitchFamily="34" charset="0"/>
+              <a:buChar char="o"/>
+            </a:pPr>
+            <a:r>
+              <a:rPr lang="en-US" sz="2000" dirty="0" err="1">
+                <a:ea typeface="Inter"/>
+                <a:cs typeface="Arial"/>
+              </a:rPr>
+              <a:t>Euroopa</a:t>
+            </a:r>
+            <a:r>
+              <a:rPr lang="en-US" sz="2000" dirty="0">
+                <a:ea typeface="Inter"/>
+                <a:cs typeface="Arial"/>
+              </a:rPr>
+              <a:t> </a:t>
+            </a:r>
+            <a:r>
+              <a:rPr lang="en-US" sz="2000" dirty="0" err="1">
+                <a:ea typeface="Inter"/>
+                <a:cs typeface="Arial"/>
+              </a:rPr>
+              <a:t>Liidu</a:t>
+            </a:r>
+            <a:r>
+              <a:rPr lang="en-US" sz="2000" dirty="0">
+                <a:ea typeface="Inter"/>
+                <a:cs typeface="Arial"/>
+              </a:rPr>
+              <a:t> </a:t>
+            </a:r>
+            <a:r>
+              <a:rPr lang="en-US" sz="2000" dirty="0" err="1">
+                <a:ea typeface="Inter"/>
+                <a:cs typeface="Arial"/>
+              </a:rPr>
+              <a:t>määrus</a:t>
+            </a:r>
+            <a:r>
+              <a:rPr lang="en-US" sz="2000" dirty="0">
+                <a:ea typeface="Inter"/>
+                <a:cs typeface="Arial"/>
+              </a:rPr>
+              <a:t>, </a:t>
+            </a:r>
+            <a:r>
+              <a:rPr lang="en-US" sz="2000" dirty="0" err="1">
+                <a:ea typeface="Inter"/>
+                <a:cs typeface="Arial"/>
+              </a:rPr>
+              <a:t>mida</a:t>
+            </a:r>
+            <a:r>
+              <a:rPr lang="en-US" sz="2000" dirty="0">
+                <a:ea typeface="Inter"/>
+                <a:cs typeface="Arial"/>
+              </a:rPr>
+              <a:t> </a:t>
+            </a:r>
+            <a:r>
+              <a:rPr lang="en-US" sz="2000" dirty="0" err="1">
+                <a:ea typeface="Inter"/>
+                <a:cs typeface="Arial"/>
+              </a:rPr>
+              <a:t>kohaldatakse</a:t>
+            </a:r>
+            <a:r>
+              <a:rPr lang="en-US" sz="2000" dirty="0">
+                <a:ea typeface="Inter"/>
+                <a:cs typeface="Arial"/>
+              </a:rPr>
+              <a:t> </a:t>
+            </a:r>
+            <a:r>
+              <a:rPr lang="en-US" sz="2000" dirty="0" err="1">
+                <a:ea typeface="Inter"/>
+                <a:cs typeface="Arial"/>
+              </a:rPr>
+              <a:t>Eestis</a:t>
+            </a:r>
+            <a:r>
+              <a:rPr lang="en-US" sz="2000" dirty="0">
+                <a:ea typeface="Inter"/>
+                <a:cs typeface="Arial"/>
+              </a:rPr>
+              <a:t> 2018. </a:t>
+            </a:r>
+            <a:r>
+              <a:rPr lang="en-US" sz="2000" dirty="0" err="1">
+                <a:ea typeface="Inter"/>
+                <a:cs typeface="Arial"/>
+              </a:rPr>
+              <a:t>aastast</a:t>
+            </a:r>
+            <a:endParaRPr lang="en-US" sz="2000" dirty="0">
+              <a:cs typeface="Arial"/>
+            </a:endParaRPr>
+          </a:p>
+          <a:p>
+            <a:pPr marL="857250" lvl="1" indent="-228600">
+              <a:lnSpc>
+                <a:spcPct val="150000"/>
+              </a:lnSpc>
+              <a:buFont typeface="Courier New" panose="020B0502030000000004" pitchFamily="34" charset="0"/>
+              <a:buChar char="o"/>
+            </a:pPr>
+            <a:r>
+              <a:rPr lang="en-US" sz="2000" dirty="0" err="1">
+                <a:ea typeface="Inter"/>
+                <a:cs typeface="Arial"/>
+              </a:rPr>
+              <a:t>Isikuandmed</a:t>
+            </a:r>
+            <a:r>
+              <a:rPr lang="en-US" sz="2000" dirty="0">
+                <a:ea typeface="Inter"/>
+                <a:cs typeface="Arial"/>
+              </a:rPr>
+              <a:t> – </a:t>
+            </a:r>
+            <a:r>
+              <a:rPr lang="en-US" sz="2000" dirty="0" err="1">
+                <a:ea typeface="Inter"/>
+                <a:cs typeface="Arial"/>
+              </a:rPr>
+              <a:t>andmed</a:t>
+            </a:r>
+            <a:r>
+              <a:rPr lang="en-US" sz="2000" dirty="0">
+                <a:ea typeface="Inter"/>
+                <a:cs typeface="Arial"/>
+              </a:rPr>
+              <a:t> </a:t>
+            </a:r>
+            <a:r>
+              <a:rPr lang="en-US" sz="2000" b="1" dirty="0" err="1">
+                <a:ea typeface="Inter"/>
+                <a:cs typeface="Arial"/>
+              </a:rPr>
+              <a:t>füüsilise</a:t>
+            </a:r>
+            <a:r>
+              <a:rPr lang="en-US" sz="2000" b="1" dirty="0">
+                <a:ea typeface="Inter"/>
+                <a:cs typeface="Arial"/>
+              </a:rPr>
+              <a:t> </a:t>
+            </a:r>
+            <a:r>
+              <a:rPr lang="en-US" sz="2000" b="1" dirty="0" err="1">
+                <a:ea typeface="Inter"/>
+                <a:cs typeface="Arial"/>
+              </a:rPr>
+              <a:t>isiku</a:t>
+            </a:r>
+            <a:r>
+              <a:rPr lang="en-US" sz="2000" b="1" dirty="0">
+                <a:ea typeface="Inter"/>
+                <a:cs typeface="Arial"/>
+              </a:rPr>
+              <a:t> </a:t>
+            </a:r>
+            <a:r>
+              <a:rPr lang="en-US" sz="2000" b="1" dirty="0" err="1">
+                <a:ea typeface="Inter"/>
+                <a:cs typeface="Arial"/>
+              </a:rPr>
+              <a:t>kohta</a:t>
+            </a:r>
+            <a:r>
+              <a:rPr lang="en-US" sz="2000" dirty="0">
+                <a:ea typeface="Inter"/>
+                <a:cs typeface="Arial"/>
+              </a:rPr>
+              <a:t>, </a:t>
+            </a:r>
+            <a:r>
+              <a:rPr lang="en-US" sz="2000" dirty="0" err="1">
+                <a:ea typeface="Inter"/>
+                <a:cs typeface="Arial"/>
+              </a:rPr>
+              <a:t>mille</a:t>
+            </a:r>
+            <a:r>
+              <a:rPr lang="en-US" sz="2000" dirty="0">
+                <a:ea typeface="Inter"/>
+                <a:cs typeface="Arial"/>
+              </a:rPr>
+              <a:t> </a:t>
+            </a:r>
+            <a:r>
+              <a:rPr lang="en-US" sz="2000" dirty="0" err="1">
+                <a:ea typeface="Inter"/>
+                <a:cs typeface="Arial"/>
+              </a:rPr>
+              <a:t>abil</a:t>
+            </a:r>
+            <a:r>
+              <a:rPr lang="en-US" sz="2000" dirty="0">
+                <a:ea typeface="Inter"/>
+                <a:cs typeface="Arial"/>
+              </a:rPr>
+              <a:t> on </a:t>
+            </a:r>
+            <a:r>
+              <a:rPr lang="en-US" sz="2000" dirty="0" err="1">
+                <a:ea typeface="Inter"/>
+                <a:cs typeface="Arial"/>
+              </a:rPr>
+              <a:t>isikut</a:t>
+            </a:r>
+            <a:r>
+              <a:rPr lang="en-US" sz="2000" dirty="0">
+                <a:ea typeface="Inter"/>
+                <a:cs typeface="Arial"/>
+              </a:rPr>
+              <a:t> </a:t>
+            </a:r>
+            <a:r>
+              <a:rPr lang="en-US" sz="2000" dirty="0" err="1">
+                <a:ea typeface="Inter"/>
+                <a:cs typeface="Arial"/>
+              </a:rPr>
+              <a:t>otseselt</a:t>
+            </a:r>
+            <a:r>
+              <a:rPr lang="en-US" sz="2000" dirty="0">
+                <a:ea typeface="Inter"/>
+                <a:cs typeface="Arial"/>
+              </a:rPr>
+              <a:t> </a:t>
+            </a:r>
+            <a:r>
+              <a:rPr lang="en-US" sz="2000" dirty="0" err="1">
+                <a:ea typeface="Inter"/>
+                <a:cs typeface="Arial"/>
+              </a:rPr>
+              <a:t>või</a:t>
+            </a:r>
+            <a:r>
+              <a:rPr lang="en-US" sz="2000" dirty="0">
+                <a:ea typeface="Inter"/>
+                <a:cs typeface="Arial"/>
+              </a:rPr>
+              <a:t> </a:t>
+            </a:r>
+            <a:r>
+              <a:rPr lang="en-US" sz="2000" dirty="0" err="1">
+                <a:ea typeface="Inter"/>
+                <a:cs typeface="Arial"/>
+              </a:rPr>
+              <a:t>kaudselt</a:t>
+            </a:r>
+            <a:r>
+              <a:rPr lang="en-US" sz="2000" dirty="0">
+                <a:ea typeface="Inter"/>
+                <a:cs typeface="Arial"/>
+              </a:rPr>
+              <a:t> </a:t>
+            </a:r>
+            <a:r>
+              <a:rPr lang="en-US" sz="2000" dirty="0" err="1">
+                <a:ea typeface="Inter"/>
+                <a:cs typeface="Arial"/>
+              </a:rPr>
+              <a:t>võimalik</a:t>
+            </a:r>
+            <a:r>
+              <a:rPr lang="en-US" sz="2000" dirty="0">
+                <a:ea typeface="Inter"/>
+                <a:cs typeface="Arial"/>
+              </a:rPr>
+              <a:t> </a:t>
+            </a:r>
+            <a:r>
+              <a:rPr lang="en-US" sz="2000" dirty="0" err="1">
+                <a:ea typeface="Inter"/>
+                <a:cs typeface="Arial"/>
+              </a:rPr>
+              <a:t>tuvastada</a:t>
+            </a:r>
+            <a:endParaRPr lang="en-US" sz="2000" dirty="0">
+              <a:ea typeface="Inter"/>
+              <a:cs typeface="Arial"/>
+            </a:endParaRPr>
+          </a:p>
+          <a:p>
+            <a:pPr marL="857250" lvl="1" indent="-228600">
+              <a:lnSpc>
+                <a:spcPct val="150000"/>
+              </a:lnSpc>
+              <a:buFont typeface="Courier New" panose="020B0502030000000004" pitchFamily="34" charset="0"/>
+              <a:buChar char="o"/>
+            </a:pPr>
+            <a:r>
+              <a:rPr lang="en-US" dirty="0" err="1">
+                <a:ea typeface="Inter"/>
+                <a:cs typeface="Arial"/>
+              </a:rPr>
+              <a:t>Lisainfo</a:t>
+            </a:r>
+            <a:r>
+              <a:rPr lang="en-US" dirty="0">
+                <a:ea typeface="Inter"/>
+                <a:cs typeface="Arial"/>
+              </a:rPr>
+              <a:t>: </a:t>
+            </a:r>
+            <a:r>
+              <a:rPr lang="en-US" dirty="0">
+                <a:ea typeface="Inter"/>
+                <a:cs typeface="Arial"/>
+                <a:hlinkClick r:id="rId4"/>
+              </a:rPr>
+              <a:t>https://www.edpb.europa.eu/sme-data-protection-guide/faq-frequently-asked-questions_en</a:t>
+            </a:r>
+            <a:r>
+              <a:rPr lang="en-US" dirty="0">
+                <a:ea typeface="Inter"/>
+                <a:cs typeface="Arial"/>
+              </a:rPr>
+              <a:t> </a:t>
+            </a:r>
+            <a:endParaRPr lang="en-US" dirty="0">
+              <a:cs typeface="Arial"/>
+            </a:endParaRPr>
+          </a:p>
+          <a:p>
+            <a:pPr>
+              <a:lnSpc>
+                <a:spcPct val="150000"/>
+              </a:lnSpc>
+              <a:buClr>
+                <a:srgbClr val="121212"/>
+              </a:buClr>
+              <a:buFont typeface="Arial" panose="020B0502030000000004" pitchFamily="34" charset="0"/>
+              <a:buChar char="•"/>
+            </a:pPr>
+            <a:r>
+              <a:rPr lang="en-US" sz="2000" dirty="0" err="1">
+                <a:ea typeface="Inter"/>
+                <a:cs typeface="Arial"/>
+                <a:hlinkClick r:id="rId5"/>
+              </a:rPr>
+              <a:t>Isikuandmete</a:t>
+            </a:r>
+            <a:r>
+              <a:rPr lang="en-US" sz="2000" dirty="0">
+                <a:ea typeface="Inter"/>
+                <a:cs typeface="Arial"/>
+                <a:hlinkClick r:id="rId5"/>
+              </a:rPr>
+              <a:t> </a:t>
+            </a:r>
+            <a:r>
+              <a:rPr lang="en-US" sz="2000" dirty="0" err="1">
+                <a:ea typeface="Inter"/>
+                <a:cs typeface="Arial"/>
+                <a:hlinkClick r:id="rId5"/>
+              </a:rPr>
+              <a:t>kaitse</a:t>
+            </a:r>
+            <a:r>
+              <a:rPr lang="en-US" sz="2000" dirty="0">
+                <a:ea typeface="Inter"/>
+                <a:cs typeface="Arial"/>
+                <a:hlinkClick r:id="rId5"/>
+              </a:rPr>
+              <a:t> </a:t>
+            </a:r>
+            <a:r>
+              <a:rPr lang="en-US" sz="2000" dirty="0" err="1">
+                <a:ea typeface="Inter"/>
+                <a:cs typeface="Arial"/>
+                <a:hlinkClick r:id="rId5"/>
+              </a:rPr>
+              <a:t>seadus</a:t>
+            </a:r>
+            <a:endParaRPr lang="en-US" sz="2000" dirty="0">
+              <a:ea typeface="Inter"/>
+              <a:cs typeface="Arial"/>
+            </a:endParaRPr>
+          </a:p>
+          <a:p>
+            <a:pPr marL="857250" lvl="1" indent="-228600">
+              <a:lnSpc>
+                <a:spcPct val="150000"/>
+              </a:lnSpc>
+              <a:buFont typeface="Courier New" panose="020B0502030000000004" pitchFamily="34" charset="0"/>
+              <a:buChar char="o"/>
+            </a:pPr>
+            <a:r>
+              <a:rPr lang="en-US" sz="2000" dirty="0">
+                <a:ea typeface="Inter"/>
+                <a:cs typeface="Arial"/>
+              </a:rPr>
+              <a:t>Täpsustab ja </a:t>
+            </a:r>
+            <a:r>
+              <a:rPr lang="en-US" sz="2000" dirty="0" err="1">
+                <a:ea typeface="Inter"/>
+                <a:cs typeface="Arial"/>
+              </a:rPr>
+              <a:t>täiendab</a:t>
+            </a:r>
+            <a:r>
+              <a:rPr lang="en-US" sz="2000" dirty="0">
+                <a:ea typeface="Inter"/>
+                <a:cs typeface="Arial"/>
+              </a:rPr>
+              <a:t> IKÜM-</a:t>
+            </a:r>
+            <a:r>
+              <a:rPr lang="en-US" sz="2000" dirty="0" err="1">
+                <a:ea typeface="Inter"/>
+                <a:cs typeface="Arial"/>
+              </a:rPr>
+              <a:t>i</a:t>
+            </a:r>
+            <a:endParaRPr lang="en-US" sz="2000" dirty="0">
+              <a:ea typeface="Inter"/>
+              <a:cs typeface="Arial"/>
+            </a:endParaRPr>
+          </a:p>
+          <a:p>
+            <a:pPr marL="342900" indent="-342900">
+              <a:lnSpc>
+                <a:spcPct val="150000"/>
+              </a:lnSpc>
+              <a:buClr>
+                <a:srgbClr val="121212"/>
+              </a:buClr>
+              <a:buFont typeface="Arial" panose="020B0502030000000004" pitchFamily="34" charset="0"/>
+              <a:buChar char="•"/>
+            </a:pPr>
+            <a:r>
+              <a:rPr lang="en-US" sz="2000" dirty="0" err="1">
+                <a:ea typeface="Inter"/>
+                <a:cs typeface="Arial"/>
+              </a:rPr>
+              <a:t>Eestis</a:t>
+            </a:r>
+            <a:r>
+              <a:rPr lang="en-US" sz="2000" dirty="0">
+                <a:ea typeface="Inter"/>
+                <a:cs typeface="Arial"/>
+              </a:rPr>
+              <a:t> </a:t>
+            </a:r>
+            <a:r>
+              <a:rPr lang="en-US" sz="2000" dirty="0" err="1">
+                <a:ea typeface="Inter"/>
+                <a:cs typeface="Arial"/>
+              </a:rPr>
+              <a:t>teostab</a:t>
+            </a:r>
+            <a:r>
+              <a:rPr lang="en-US" sz="2000" dirty="0">
+                <a:ea typeface="Inter"/>
+                <a:cs typeface="Arial"/>
+              </a:rPr>
+              <a:t> </a:t>
+            </a:r>
+            <a:r>
+              <a:rPr lang="en-US" sz="2000" dirty="0" err="1">
+                <a:ea typeface="Inter"/>
+                <a:cs typeface="Arial"/>
+              </a:rPr>
+              <a:t>järelvalvet</a:t>
+            </a:r>
+            <a:r>
+              <a:rPr lang="en-US" sz="2000" dirty="0">
+                <a:ea typeface="Inter"/>
+                <a:cs typeface="Arial"/>
+              </a:rPr>
+              <a:t> </a:t>
+            </a:r>
+            <a:r>
+              <a:rPr lang="en-US" sz="2000" dirty="0" err="1">
+                <a:ea typeface="Inter"/>
+                <a:cs typeface="Arial"/>
+              </a:rPr>
+              <a:t>Andmekaitse</a:t>
+            </a:r>
+            <a:r>
+              <a:rPr lang="en-US" sz="2000" dirty="0">
+                <a:ea typeface="Inter"/>
+                <a:cs typeface="Arial"/>
+              </a:rPr>
+              <a:t> </a:t>
+            </a:r>
+            <a:r>
+              <a:rPr lang="en-US" sz="2000" dirty="0" err="1">
+                <a:ea typeface="Inter"/>
+                <a:cs typeface="Arial"/>
+              </a:rPr>
+              <a:t>Inspektsioon</a:t>
+            </a:r>
+            <a:endParaRPr lang="en-US" sz="2000" dirty="0">
+              <a:cs typeface="Arial"/>
+            </a:endParaRPr>
+          </a:p>
+          <a:p>
+            <a:pPr marL="857250" lvl="1" indent="-342900">
+              <a:lnSpc>
+                <a:spcPct val="150000"/>
+              </a:lnSpc>
+              <a:buFont typeface="Courier New" panose="020B0502030000000004" pitchFamily="34" charset="0"/>
+              <a:buChar char="o"/>
+            </a:pPr>
+            <a:endParaRPr lang="en-US" sz="2400" dirty="0">
+              <a:cs typeface="Arial"/>
+            </a:endParaRPr>
+          </a:p>
+          <a:p>
+            <a:pPr marL="342900" indent="-342900">
+              <a:lnSpc>
+                <a:spcPct val="150000"/>
+              </a:lnSpc>
+              <a:buClr>
+                <a:srgbClr val="121212"/>
+              </a:buClr>
+              <a:buFont typeface="Arial" panose="020B0502030000000004" pitchFamily="34" charset="0"/>
+              <a:buChar char="•"/>
+            </a:pPr>
+            <a:endParaRPr lang="en-US" sz="2400" dirty="0">
+              <a:cs typeface="Arial"/>
+            </a:endParaRPr>
+          </a:p>
+          <a:p>
+            <a:pPr marL="514350" indent="-514350">
+              <a:lnSpc>
+                <a:spcPct val="150000"/>
+              </a:lnSpc>
+              <a:buFont typeface="Arial" panose="020B0502030000000004" pitchFamily="34" charset="0"/>
+              <a:buChar char="•"/>
+            </a:pPr>
+            <a:endParaRPr lang="en-US" sz="2800" dirty="0">
+              <a:cs typeface="Arial"/>
+            </a:endParaRPr>
+          </a:p>
+          <a:p>
+            <a:pPr marL="0" indent="0">
+              <a:lnSpc>
+                <a:spcPct val="150000"/>
+              </a:lnSpc>
+              <a:buNone/>
+            </a:pPr>
+            <a:endParaRPr lang="en-US" sz="2800" dirty="0"/>
+          </a:p>
+        </p:txBody>
+      </p:sp>
+    </p:spTree>
+    <p:extLst>
+      <p:ext uri="{BB962C8B-B14F-4D97-AF65-F5344CB8AC3E}">
+        <p14:creationId xmlns:p14="http://schemas.microsoft.com/office/powerpoint/2010/main" val="223049910"/>
+      </p:ext>
+    </p:extLst>
+  </p:cSld>
+  <p:clrMapOvr>
+    <a:masterClrMapping/>
+  </p:clrMapOvr>
+  <p:timing>
+    <p:tnLst>
+      <p:par>
+        <p:cTn id="1" dur="indefinite" restart="never" nodeType="tmRoot">
+          <p:childTnLst>
+            <p:seq concurrent="1" nextAc="seek">
+              <p:cTn id="2" dur="indefinite" nodeType="mainSeq">
+                <p:childTnLst>
+                  <p:par>
+                    <p:cTn id="3" fill="hold">
+                      <p:stCondLst>
+                        <p:cond delay="indefinite"/>
+                      </p:stCondLst>
+                      <p:childTnLst>
+                        <p:par>
+                          <p:cTn id="4" fill="hold">
+                            <p:stCondLst>
+                              <p:cond delay="0"/>
+                            </p:stCondLst>
+                            <p:childTnLst>
+                              <p:par>
+                                <p:cTn id="5" presetID="1" presetClass="entr" presetSubtype="0" fill="hold" grpId="0" nodeType="clickEffect">
+                                  <p:stCondLst>
+                                    <p:cond delay="0"/>
+                                  </p:stCondLst>
+                                  <p:childTnLst>
+                                    <p:set>
+                                      <p:cBhvr>
+                                        <p:cTn id="6" dur="1" fill="hold">
+                                          <p:stCondLst>
+                                            <p:cond delay="0"/>
+                                          </p:stCondLst>
+                                        </p:cTn>
+                                        <p:tgtEl>
+                                          <p:spTgt spid="3">
+                                            <p:txEl>
+                                              <p:pRg st="0" end="0"/>
+                                            </p:txEl>
+                                          </p:spTgt>
+                                        </p:tgtEl>
+                                        <p:attrNameLst>
+                                          <p:attrName>style.visibility</p:attrName>
+                                        </p:attrNameLst>
+                                      </p:cBhvr>
+                                      <p:to>
+                                        <p:strVal val="visible"/>
+                                      </p:to>
+                                    </p:set>
+                                  </p:childTnLst>
+                                </p:cTn>
+                              </p:par>
+                            </p:childTnLst>
+                          </p:cTn>
+                        </p:par>
+                      </p:childTnLst>
+                    </p:cTn>
+                  </p:par>
+                  <p:par>
+                    <p:cTn id="7" fill="hold">
+                      <p:stCondLst>
+                        <p:cond delay="indefinite"/>
+                      </p:stCondLst>
+                      <p:childTnLst>
+                        <p:par>
+                          <p:cTn id="8" fill="hold">
+                            <p:stCondLst>
+                              <p:cond delay="0"/>
+                            </p:stCondLst>
+                            <p:childTnLst>
+                              <p:par>
+                                <p:cTn id="9" presetID="1" presetClass="entr" presetSubtype="0" fill="hold" grpId="0" nodeType="clickEffect">
+                                  <p:stCondLst>
+                                    <p:cond delay="0"/>
+                                  </p:stCondLst>
+                                  <p:childTnLst>
+                                    <p:set>
+                                      <p:cBhvr>
+                                        <p:cTn id="10" dur="1" fill="hold">
+                                          <p:stCondLst>
+                                            <p:cond delay="0"/>
+                                          </p:stCondLst>
+                                        </p:cTn>
+                                        <p:tgtEl>
+                                          <p:spTgt spid="3">
+                                            <p:txEl>
+                                              <p:pRg st="1" end="1"/>
+                                            </p:txEl>
+                                          </p:spTgt>
+                                        </p:tgtEl>
+                                        <p:attrNameLst>
+                                          <p:attrName>style.visibility</p:attrName>
+                                        </p:attrNameLst>
+                                      </p:cBhvr>
+                                      <p:to>
+                                        <p:strVal val="visible"/>
+                                      </p:to>
+                                    </p:set>
+                                  </p:childTnLst>
+                                </p:cTn>
+                              </p:par>
+                            </p:childTnLst>
+                          </p:cTn>
+                        </p:par>
+                      </p:childTnLst>
+                    </p:cTn>
+                  </p:par>
+                  <p:par>
+                    <p:cTn id="11" fill="hold">
+                      <p:stCondLst>
+                        <p:cond delay="indefinite"/>
+                      </p:stCondLst>
+                      <p:childTnLst>
+                        <p:par>
+                          <p:cTn id="12" fill="hold">
+                            <p:stCondLst>
+                              <p:cond delay="0"/>
+                            </p:stCondLst>
+                            <p:childTnLst>
+                              <p:par>
+                                <p:cTn id="13" presetID="1" presetClass="entr" presetSubtype="0" fill="hold" grpId="0" nodeType="clickEffect">
+                                  <p:stCondLst>
+                                    <p:cond delay="0"/>
+                                  </p:stCondLst>
+                                  <p:childTnLst>
+                                    <p:set>
+                                      <p:cBhvr>
+                                        <p:cTn id="14" dur="1" fill="hold">
+                                          <p:stCondLst>
+                                            <p:cond delay="0"/>
+                                          </p:stCondLst>
+                                        </p:cTn>
+                                        <p:tgtEl>
+                                          <p:spTgt spid="3">
+                                            <p:txEl>
+                                              <p:pRg st="2" end="2"/>
+                                            </p:txEl>
+                                          </p:spTgt>
+                                        </p:tgtEl>
+                                        <p:attrNameLst>
+                                          <p:attrName>style.visibility</p:attrName>
+                                        </p:attrNameLst>
+                                      </p:cBhvr>
+                                      <p:to>
+                                        <p:strVal val="visible"/>
+                                      </p:to>
+                                    </p:set>
+                                  </p:childTnLst>
+                                </p:cTn>
+                              </p:par>
+                              <p:par>
+                                <p:cTn id="15" presetID="1" presetClass="entr" presetSubtype="0" fill="hold" grpId="0" nodeType="withEffect">
+                                  <p:stCondLst>
+                                    <p:cond delay="0"/>
+                                  </p:stCondLst>
+                                  <p:childTnLst>
+                                    <p:set>
+                                      <p:cBhvr>
+                                        <p:cTn id="16" dur="1" fill="hold">
+                                          <p:stCondLst>
+                                            <p:cond delay="0"/>
+                                          </p:stCondLst>
+                                        </p:cTn>
+                                        <p:tgtEl>
+                                          <p:spTgt spid="3">
+                                            <p:txEl>
+                                              <p:pRg st="3" end="3"/>
+                                            </p:txEl>
+                                          </p:spTgt>
+                                        </p:tgtEl>
+                                        <p:attrNameLst>
+                                          <p:attrName>style.visibility</p:attrName>
+                                        </p:attrNameLst>
+                                      </p:cBhvr>
+                                      <p:to>
+                                        <p:strVal val="visible"/>
+                                      </p:to>
+                                    </p:set>
+                                  </p:childTnLst>
+                                </p:cTn>
+                              </p:par>
+                              <p:par>
+                                <p:cTn id="17" presetID="1" presetClass="entr" presetSubtype="0" fill="hold" grpId="0" nodeType="withEffect">
+                                  <p:stCondLst>
+                                    <p:cond delay="0"/>
+                                  </p:stCondLst>
+                                  <p:childTnLst>
+                                    <p:set>
+                                      <p:cBhvr>
+                                        <p:cTn id="18" dur="1" fill="hold">
+                                          <p:stCondLst>
+                                            <p:cond delay="0"/>
+                                          </p:stCondLst>
+                                        </p:cTn>
+                                        <p:tgtEl>
+                                          <p:spTgt spid="3">
+                                            <p:txEl>
+                                              <p:pRg st="4" end="4"/>
+                                            </p:txEl>
+                                          </p:spTgt>
+                                        </p:tgtEl>
+                                        <p:attrNameLst>
+                                          <p:attrName>style.visibility</p:attrName>
+                                        </p:attrNameLst>
+                                      </p:cBhvr>
+                                      <p:to>
+                                        <p:strVal val="visible"/>
+                                      </p:to>
+                                    </p:set>
+                                  </p:childTnLst>
+                                </p:cTn>
+                              </p:par>
+                              <p:par>
+                                <p:cTn id="19" presetID="1" presetClass="entr" presetSubtype="0" fill="hold" grpId="0" nodeType="withEffect">
+                                  <p:stCondLst>
+                                    <p:cond delay="0"/>
+                                  </p:stCondLst>
+                                  <p:childTnLst>
+                                    <p:set>
+                                      <p:cBhvr>
+                                        <p:cTn id="20" dur="1" fill="hold">
+                                          <p:stCondLst>
+                                            <p:cond delay="0"/>
+                                          </p:stCondLst>
+                                        </p:cTn>
+                                        <p:tgtEl>
+                                          <p:spTgt spid="3">
+                                            <p:txEl>
+                                              <p:pRg st="5" end="5"/>
+                                            </p:txEl>
+                                          </p:spTgt>
+                                        </p:tgtEl>
+                                        <p:attrNameLst>
+                                          <p:attrName>style.visibility</p:attrName>
+                                        </p:attrNameLst>
+                                      </p:cBhvr>
+                                      <p:to>
+                                        <p:strVal val="visible"/>
+                                      </p:to>
+                                    </p:set>
+                                  </p:childTnLst>
+                                </p:cTn>
+                              </p:par>
+                            </p:childTnLst>
+                          </p:cTn>
+                        </p:par>
+                      </p:childTnLst>
+                    </p:cTn>
+                  </p:par>
+                  <p:par>
+                    <p:cTn id="21" fill="hold">
+                      <p:stCondLst>
+                        <p:cond delay="indefinite"/>
+                      </p:stCondLst>
+                      <p:childTnLst>
+                        <p:par>
+                          <p:cTn id="22" fill="hold">
+                            <p:stCondLst>
+                              <p:cond delay="0"/>
+                            </p:stCondLst>
+                            <p:childTnLst>
+                              <p:par>
+                                <p:cTn id="23" presetID="1" presetClass="entr" presetSubtype="0" fill="hold" grpId="0" nodeType="clickEffect">
+                                  <p:stCondLst>
+                                    <p:cond delay="0"/>
+                                  </p:stCondLst>
+                                  <p:childTnLst>
+                                    <p:set>
+                                      <p:cBhvr>
+                                        <p:cTn id="24" dur="1" fill="hold">
+                                          <p:stCondLst>
+                                            <p:cond delay="0"/>
+                                          </p:stCondLst>
+                                        </p:cTn>
+                                        <p:tgtEl>
+                                          <p:spTgt spid="3">
+                                            <p:txEl>
+                                              <p:pRg st="6" end="6"/>
+                                            </p:txEl>
+                                          </p:spTgt>
+                                        </p:tgtEl>
+                                        <p:attrNameLst>
+                                          <p:attrName>style.visibility</p:attrName>
+                                        </p:attrNameLst>
+                                      </p:cBhvr>
+                                      <p:to>
+                                        <p:strVal val="visible"/>
+                                      </p:to>
+                                    </p:set>
+                                  </p:childTnLst>
+                                </p:cTn>
+                              </p:par>
+                              <p:par>
+                                <p:cTn id="25" presetID="1" presetClass="entr" presetSubtype="0" fill="hold" grpId="0" nodeType="withEffect">
+                                  <p:stCondLst>
+                                    <p:cond delay="0"/>
+                                  </p:stCondLst>
+                                  <p:childTnLst>
+                                    <p:set>
+                                      <p:cBhvr>
+                                        <p:cTn id="26" dur="1" fill="hold">
+                                          <p:stCondLst>
+                                            <p:cond delay="0"/>
+                                          </p:stCondLst>
+                                        </p:cTn>
+                                        <p:tgtEl>
+                                          <p:spTgt spid="3">
+                                            <p:txEl>
+                                              <p:pRg st="7" end="7"/>
+                                            </p:txEl>
+                                          </p:spTgt>
+                                        </p:tgtEl>
+                                        <p:attrNameLst>
+                                          <p:attrName>style.visibility</p:attrName>
+                                        </p:attrNameLst>
+                                      </p:cBhvr>
+                                      <p:to>
+                                        <p:strVal val="visible"/>
+                                      </p:to>
+                                    </p:set>
+                                  </p:childTnLst>
+                                </p:cTn>
+                              </p:par>
+                            </p:childTnLst>
+                          </p:cTn>
+                        </p:par>
+                      </p:childTnLst>
+                    </p:cTn>
+                  </p:par>
+                  <p:par>
+                    <p:cTn id="27" fill="hold">
+                      <p:stCondLst>
+                        <p:cond delay="indefinite"/>
+                      </p:stCondLst>
+                      <p:childTnLst>
+                        <p:par>
+                          <p:cTn id="28" fill="hold">
+                            <p:stCondLst>
+                              <p:cond delay="0"/>
+                            </p:stCondLst>
+                            <p:childTnLst>
+                              <p:par>
+                                <p:cTn id="29" presetID="1" presetClass="entr" presetSubtype="0" fill="hold" grpId="0" nodeType="clickEffect">
+                                  <p:stCondLst>
+                                    <p:cond delay="0"/>
+                                  </p:stCondLst>
+                                  <p:childTnLst>
+                                    <p:set>
+                                      <p:cBhvr>
+                                        <p:cTn id="30" dur="1" fill="hold">
+                                          <p:stCondLst>
+                                            <p:cond delay="0"/>
+                                          </p:stCondLst>
+                                        </p:cTn>
+                                        <p:tgtEl>
+                                          <p:spTgt spid="3">
+                                            <p:txEl>
+                                              <p:pRg st="8" end="8"/>
+                                            </p:txEl>
+                                          </p:spTgt>
+                                        </p:tgtEl>
+                                        <p:attrNameLst>
+                                          <p:attrName>style.visibility</p:attrName>
+                                        </p:attrNameLst>
+                                      </p:cBhvr>
+                                      <p:to>
+                                        <p:strVal val="visible"/>
+                                      </p:to>
+                                    </p:set>
+                                  </p:childTnLst>
+                                </p:cTn>
+                              </p:par>
+                            </p:childTnLst>
+                          </p:cTn>
+                        </p:par>
+                      </p:childTnLst>
+                    </p:cTn>
+                  </p:par>
+                </p:childTnLst>
+              </p:cTn>
+              <p:prevCondLst>
+                <p:cond evt="onPrev" delay="0">
+                  <p:tgtEl>
+                    <p:sldTgt/>
+                  </p:tgtEl>
+                </p:cond>
+              </p:prevCondLst>
+              <p:nextCondLst>
+                <p:cond evt="onNext" delay="0">
+                  <p:tgtEl>
+                    <p:sldTgt/>
+                  </p:tgtEl>
+                </p:cond>
+              </p:nextCondLst>
+            </p:seq>
+          </p:childTnLst>
+        </p:cTn>
+      </p:par>
+    </p:tnLst>
+    <p:bldLst>
+      <p:bldP spid="3" grpId="0" build="p"/>
+    </p:bldLst>
+  </p:timing>
+</p:sld>
+</file>
+
+<file path=ppt/slides/slide30.xml><?xml version="1.0" encoding="utf-8"?>
 <p:sld xmlns:a="http://schemas.openxmlformats.org/drawingml/2006/main" xmlns:r="http://schemas.openxmlformats.org/officeDocument/2006/relationships" xmlns:p="http://schemas.openxmlformats.org/presentationml/2006/main">
   <p:cSld>
     <p:spTree>
@@ -41610,1421 +43607,7 @@
 </p:sld>
 </file>
 
-<file path=ppt/slides/slide3.xml><?xml version="1.0" encoding="utf-8"?>
-<p:sld xmlns:a="http://schemas.openxmlformats.org/drawingml/2006/main" xmlns:r="http://schemas.openxmlformats.org/officeDocument/2006/relationships" xmlns:p="http://schemas.openxmlformats.org/presentationml/2006/main">
-  <p:cSld>
-    <p:spTree>
-      <p:nvGrpSpPr>
-        <p:cNvPr id="1" name="">
-          <a:extLst>
-            <a:ext uri="{FF2B5EF4-FFF2-40B4-BE49-F238E27FC236}">
-              <a16:creationId xmlns:a16="http://schemas.microsoft.com/office/drawing/2014/main" id="{ED2228FF-8F2E-5210-1E51-C5B71DFE1BF5}"/>
-            </a:ext>
-          </a:extLst>
-        </p:cNvPr>
-        <p:cNvGrpSpPr/>
-        <p:nvPr/>
-      </p:nvGrpSpPr>
-      <p:grpSpPr>
-        <a:xfrm>
-          <a:off x="0" y="0"/>
-          <a:ext cx="0" cy="0"/>
-          <a:chOff x="0" y="0"/>
-          <a:chExt cx="0" cy="0"/>
-        </a:xfrm>
-      </p:grpSpPr>
-      <p:sp>
-        <p:nvSpPr>
-          <p:cNvPr id="2" name="Title 1">
-            <a:extLst>
-              <a:ext uri="{FF2B5EF4-FFF2-40B4-BE49-F238E27FC236}">
-                <a16:creationId xmlns:a16="http://schemas.microsoft.com/office/drawing/2014/main" id="{917D2EE0-DAF0-D014-1B9C-E5A2B2D5174F}"/>
-              </a:ext>
-            </a:extLst>
-          </p:cNvPr>
-          <p:cNvSpPr>
-            <a:spLocks noGrp="1"/>
-          </p:cNvSpPr>
-          <p:nvPr>
-            <p:ph type="ctrTitle"/>
-          </p:nvPr>
-        </p:nvSpPr>
-        <p:spPr/>
-        <p:txBody>
-          <a:bodyPr/>
-          <a:lstStyle/>
-          <a:p>
-            <a:r>
-              <a:rPr lang="en-US" sz="3600" b="1" err="1"/>
-              <a:t>Andmekaitse</a:t>
-            </a:r>
-            <a:endParaRPr lang="en-US" err="1"/>
-          </a:p>
-        </p:txBody>
-      </p:sp>
-      <p:sp>
-        <p:nvSpPr>
-          <p:cNvPr id="3" name="Content Placeholder 2">
-            <a:extLst>
-              <a:ext uri="{FF2B5EF4-FFF2-40B4-BE49-F238E27FC236}">
-                <a16:creationId xmlns:a16="http://schemas.microsoft.com/office/drawing/2014/main" id="{EA490F2F-9A95-2356-2F41-6D1F85E5FA20}"/>
-              </a:ext>
-            </a:extLst>
-          </p:cNvPr>
-          <p:cNvSpPr>
-            <a:spLocks noGrp="1"/>
-          </p:cNvSpPr>
-          <p:nvPr>
-            <p:ph sz="quarter" idx="10"/>
-          </p:nvPr>
-        </p:nvSpPr>
-        <p:spPr/>
-        <p:txBody>
-          <a:bodyPr/>
-          <a:lstStyle/>
-          <a:p>
-            <a:pPr marL="342900" indent="-342900">
-              <a:lnSpc>
-                <a:spcPct val="150000"/>
-              </a:lnSpc>
-              <a:buFont typeface="Arial" panose="020B0502030000000004" pitchFamily="34" charset="0"/>
-              <a:buChar char="•"/>
-            </a:pPr>
-            <a:r>
-              <a:rPr lang="en-US" sz="2000" dirty="0" err="1">
-                <a:ea typeface="Inter"/>
-                <a:cs typeface="Arial"/>
-              </a:rPr>
-              <a:t>Andmesubjekt</a:t>
-            </a:r>
-            <a:r>
-              <a:rPr lang="en-US" sz="2000" dirty="0">
-                <a:ea typeface="Inter"/>
-                <a:cs typeface="Arial"/>
-              </a:rPr>
-              <a:t> </a:t>
-            </a:r>
-            <a:r>
-              <a:rPr lang="en-US" sz="2000" dirty="0" err="1">
-                <a:ea typeface="Inter"/>
-                <a:cs typeface="Arial"/>
-              </a:rPr>
-              <a:t>peab</a:t>
-            </a:r>
-            <a:r>
-              <a:rPr lang="en-US" sz="2000" dirty="0">
-                <a:ea typeface="Inter"/>
-                <a:cs typeface="Arial"/>
-              </a:rPr>
-              <a:t> </a:t>
-            </a:r>
-            <a:r>
-              <a:rPr lang="en-US" sz="2000" dirty="0" err="1">
-                <a:ea typeface="Inter"/>
-                <a:cs typeface="Arial"/>
-              </a:rPr>
-              <a:t>teadma</a:t>
-            </a:r>
-            <a:r>
-              <a:rPr lang="en-US" sz="2000" dirty="0">
-                <a:ea typeface="Inter"/>
-                <a:cs typeface="Arial"/>
-              </a:rPr>
-              <a:t>, mis </a:t>
-            </a:r>
-            <a:r>
-              <a:rPr lang="en-US" sz="2000" dirty="0" err="1">
-                <a:ea typeface="Inter"/>
-                <a:cs typeface="Arial"/>
-              </a:rPr>
-              <a:t>andmeid</a:t>
-            </a:r>
-            <a:r>
-              <a:rPr lang="en-US" sz="2000" dirty="0">
-                <a:ea typeface="Inter"/>
-                <a:cs typeface="Arial"/>
-              </a:rPr>
-              <a:t>, mis </a:t>
-            </a:r>
-            <a:r>
-              <a:rPr lang="en-US" sz="2000" dirty="0" err="1">
-                <a:ea typeface="Inter"/>
-                <a:cs typeface="Arial"/>
-              </a:rPr>
-              <a:t>eesmärgiga</a:t>
-            </a:r>
-            <a:r>
-              <a:rPr lang="en-US" sz="2000" dirty="0">
-                <a:ea typeface="Inter"/>
-                <a:cs typeface="Arial"/>
-              </a:rPr>
-              <a:t> ja </a:t>
-            </a:r>
-            <a:r>
-              <a:rPr lang="en-US" sz="2000" dirty="0" err="1">
-                <a:ea typeface="Inter"/>
-                <a:cs typeface="Arial"/>
-              </a:rPr>
-              <a:t>kui</a:t>
-            </a:r>
-            <a:r>
-              <a:rPr lang="en-US" sz="2000" dirty="0">
-                <a:ea typeface="Inter"/>
-                <a:cs typeface="Arial"/>
-              </a:rPr>
-              <a:t> </a:t>
-            </a:r>
-            <a:r>
-              <a:rPr lang="en-US" sz="2000" dirty="0" err="1">
-                <a:ea typeface="Inter"/>
-                <a:cs typeface="Arial"/>
-              </a:rPr>
-              <a:t>kaua</a:t>
-            </a:r>
-            <a:r>
-              <a:rPr lang="en-US" sz="2000" dirty="0">
-                <a:ea typeface="Inter"/>
-                <a:cs typeface="Arial"/>
-              </a:rPr>
-              <a:t> </a:t>
-            </a:r>
-            <a:r>
-              <a:rPr lang="en-US" sz="2000" dirty="0" err="1">
-                <a:ea typeface="Inter"/>
-                <a:cs typeface="Arial"/>
-              </a:rPr>
-              <a:t>kogutakse</a:t>
-            </a:r>
-            <a:r>
-              <a:rPr lang="en-US" sz="2000" dirty="0">
-                <a:ea typeface="Inter"/>
-                <a:cs typeface="Arial"/>
-              </a:rPr>
-              <a:t>, </a:t>
-            </a:r>
-            <a:r>
-              <a:rPr lang="en-US" sz="2000" dirty="0" err="1">
-                <a:ea typeface="Inter"/>
-                <a:cs typeface="Arial"/>
-              </a:rPr>
-              <a:t>töödeldakse</a:t>
-            </a:r>
-            <a:r>
-              <a:rPr lang="en-US" sz="2000" dirty="0">
-                <a:ea typeface="Inter"/>
-                <a:cs typeface="Arial"/>
-              </a:rPr>
-              <a:t> (</a:t>
-            </a:r>
-            <a:r>
-              <a:rPr lang="en-US" sz="2000" dirty="0" err="1">
-                <a:ea typeface="Inter"/>
-                <a:cs typeface="Arial"/>
-              </a:rPr>
-              <a:t>sh</a:t>
-            </a:r>
-            <a:r>
-              <a:rPr lang="en-US" sz="2000" dirty="0">
-                <a:ea typeface="Inter"/>
-                <a:cs typeface="Arial"/>
-              </a:rPr>
-              <a:t> </a:t>
-            </a:r>
-            <a:r>
-              <a:rPr lang="en-US" sz="2000" dirty="0" err="1">
-                <a:ea typeface="Inter"/>
-                <a:cs typeface="Arial"/>
-              </a:rPr>
-              <a:t>vaadatakse</a:t>
-            </a:r>
-            <a:r>
-              <a:rPr lang="en-US" sz="2000" dirty="0">
-                <a:ea typeface="Inter"/>
-                <a:cs typeface="Arial"/>
-              </a:rPr>
-              <a:t>) ja </a:t>
-            </a:r>
-            <a:r>
-              <a:rPr lang="en-US" sz="2000" dirty="0" err="1">
-                <a:ea typeface="Inter"/>
-                <a:cs typeface="Arial"/>
-              </a:rPr>
-              <a:t>hoiustatakse</a:t>
-            </a:r>
-            <a:r>
-              <a:rPr lang="en-US" sz="2000" dirty="0">
-                <a:ea typeface="Inter"/>
-                <a:cs typeface="Arial"/>
-              </a:rPr>
-              <a:t>.</a:t>
-            </a:r>
-            <a:endParaRPr lang="en-US" sz="2000" dirty="0">
-              <a:cs typeface="Arial"/>
-            </a:endParaRPr>
-          </a:p>
-          <a:p>
-            <a:pPr marL="857250" lvl="1" indent="-342900">
-              <a:lnSpc>
-                <a:spcPct val="150000"/>
-              </a:lnSpc>
-              <a:buFont typeface="Courier New" panose="020B0502030000000004" pitchFamily="34" charset="0"/>
-              <a:buChar char="o"/>
-            </a:pPr>
-            <a:r>
-              <a:rPr lang="en-US" sz="2000" dirty="0" err="1">
-                <a:ea typeface="Inter"/>
-                <a:cs typeface="Arial"/>
-              </a:rPr>
-              <a:t>Andmesubjekt</a:t>
-            </a:r>
-            <a:r>
-              <a:rPr lang="en-US" sz="2000" dirty="0">
-                <a:ea typeface="Inter"/>
-                <a:cs typeface="Arial"/>
-              </a:rPr>
-              <a:t> - </a:t>
-            </a:r>
-            <a:r>
-              <a:rPr lang="en-US" sz="2000" dirty="0" err="1">
-                <a:ea typeface="Inter"/>
-                <a:cs typeface="Arial"/>
-              </a:rPr>
-              <a:t>füüsiline</a:t>
-            </a:r>
-            <a:r>
-              <a:rPr lang="en-US" sz="2000" dirty="0">
-                <a:ea typeface="Inter"/>
-                <a:cs typeface="Arial"/>
-              </a:rPr>
-              <a:t> </a:t>
-            </a:r>
-            <a:r>
-              <a:rPr lang="en-US" sz="2000" dirty="0" err="1">
-                <a:ea typeface="Inter"/>
-                <a:cs typeface="Arial"/>
-              </a:rPr>
-              <a:t>isik</a:t>
-            </a:r>
-            <a:r>
-              <a:rPr lang="en-US" sz="2000" dirty="0">
-                <a:ea typeface="Inter"/>
-                <a:cs typeface="Arial"/>
-              </a:rPr>
-              <a:t> </a:t>
-            </a:r>
-            <a:r>
-              <a:rPr lang="en-US" sz="2000" dirty="0" err="1">
-                <a:ea typeface="Inter"/>
-                <a:cs typeface="Arial"/>
-              </a:rPr>
-              <a:t>ehk</a:t>
-            </a:r>
-            <a:r>
-              <a:rPr lang="en-US" sz="2000" dirty="0">
-                <a:ea typeface="Inter"/>
-                <a:cs typeface="Arial"/>
-              </a:rPr>
-              <a:t> </a:t>
-            </a:r>
-            <a:r>
-              <a:rPr lang="en-US" sz="2000" dirty="0" err="1">
-                <a:ea typeface="Inter"/>
-                <a:cs typeface="Arial"/>
-              </a:rPr>
-              <a:t>inimene</a:t>
-            </a:r>
-            <a:r>
-              <a:rPr lang="en-US" sz="2000" dirty="0">
-                <a:ea typeface="Inter"/>
-                <a:cs typeface="Arial"/>
-              </a:rPr>
-              <a:t>, </a:t>
-            </a:r>
-            <a:r>
-              <a:rPr lang="en-US" sz="2000" dirty="0" err="1">
-                <a:ea typeface="Inter"/>
-                <a:cs typeface="Arial"/>
-              </a:rPr>
-              <a:t>kelle</a:t>
-            </a:r>
-            <a:r>
-              <a:rPr lang="en-US" sz="2000" dirty="0">
-                <a:ea typeface="Inter"/>
-                <a:cs typeface="Arial"/>
-              </a:rPr>
-              <a:t> </a:t>
-            </a:r>
-            <a:r>
-              <a:rPr lang="en-US" sz="2000" dirty="0" err="1">
-                <a:ea typeface="Inter"/>
-                <a:cs typeface="Arial"/>
-              </a:rPr>
-              <a:t>andmeid</a:t>
-            </a:r>
-            <a:r>
-              <a:rPr lang="en-US" sz="2000" dirty="0">
-                <a:ea typeface="Inter"/>
-                <a:cs typeface="Arial"/>
-              </a:rPr>
-              <a:t> </a:t>
-            </a:r>
-            <a:r>
-              <a:rPr lang="en-US" sz="2000" dirty="0" err="1">
-                <a:ea typeface="Inter"/>
-                <a:cs typeface="Arial"/>
-              </a:rPr>
-              <a:t>töödeldakse</a:t>
-            </a:r>
-            <a:r>
-              <a:rPr lang="en-US" sz="2000" dirty="0">
-                <a:ea typeface="Inter"/>
-                <a:cs typeface="Arial"/>
-              </a:rPr>
-              <a:t>.</a:t>
-            </a:r>
-            <a:endParaRPr lang="en-US" sz="2000" dirty="0">
-              <a:solidFill>
-                <a:srgbClr val="121212"/>
-              </a:solidFill>
-              <a:latin typeface="Inter"/>
-              <a:ea typeface="Inter"/>
-              <a:cs typeface="Arial"/>
-            </a:endParaRPr>
-          </a:p>
-          <a:p>
-            <a:pPr marL="342900" indent="-342900">
-              <a:lnSpc>
-                <a:spcPct val="150000"/>
-              </a:lnSpc>
-              <a:buFont typeface="Arial" panose="020B0502030000000004" pitchFamily="34" charset="0"/>
-              <a:buChar char="•"/>
-            </a:pPr>
-            <a:r>
-              <a:rPr lang="en-US" sz="2000" dirty="0" err="1">
-                <a:ea typeface="Inter"/>
-                <a:cs typeface="Arial"/>
-                <a:hlinkClick r:id="rId3"/>
-              </a:rPr>
-              <a:t>Isikuandmete</a:t>
-            </a:r>
-            <a:r>
-              <a:rPr lang="en-US" sz="2000" dirty="0">
-                <a:ea typeface="Inter"/>
-                <a:cs typeface="Arial"/>
-                <a:hlinkClick r:id="rId3"/>
-              </a:rPr>
-              <a:t> </a:t>
-            </a:r>
-            <a:r>
-              <a:rPr lang="en-US" sz="2000" dirty="0" err="1">
-                <a:ea typeface="Inter"/>
-                <a:cs typeface="Arial"/>
-                <a:hlinkClick r:id="rId3"/>
-              </a:rPr>
-              <a:t>üldkaitse</a:t>
-            </a:r>
-            <a:r>
-              <a:rPr lang="en-US" sz="2000" dirty="0">
-                <a:ea typeface="Inter"/>
-                <a:cs typeface="Arial"/>
-                <a:hlinkClick r:id="rId3"/>
-              </a:rPr>
-              <a:t> </a:t>
-            </a:r>
-            <a:r>
-              <a:rPr lang="en-US" sz="2000" dirty="0" err="1">
-                <a:ea typeface="Inter"/>
-                <a:cs typeface="Arial"/>
-                <a:hlinkClick r:id="rId3"/>
-              </a:rPr>
-              <a:t>määrus</a:t>
-            </a:r>
-            <a:r>
-              <a:rPr lang="en-US" sz="2000" dirty="0">
-                <a:ea typeface="Inter"/>
-                <a:cs typeface="Arial"/>
-                <a:hlinkClick r:id="rId3"/>
-              </a:rPr>
-              <a:t> (IKÜM)</a:t>
-            </a:r>
-            <a:endParaRPr lang="en-US" sz="2000" dirty="0">
-              <a:ea typeface="Inter"/>
-              <a:cs typeface="Arial"/>
-            </a:endParaRPr>
-          </a:p>
-          <a:p>
-            <a:pPr marL="857250" lvl="1" indent="-228600">
-              <a:lnSpc>
-                <a:spcPct val="150000"/>
-              </a:lnSpc>
-              <a:buFont typeface="Courier New" panose="020B0502030000000004" pitchFamily="34" charset="0"/>
-              <a:buChar char="o"/>
-            </a:pPr>
-            <a:r>
-              <a:rPr lang="en-US" sz="2000" dirty="0" err="1">
-                <a:ea typeface="Inter"/>
-                <a:cs typeface="Arial"/>
-              </a:rPr>
-              <a:t>Euroopa</a:t>
-            </a:r>
-            <a:r>
-              <a:rPr lang="en-US" sz="2000" dirty="0">
-                <a:ea typeface="Inter"/>
-                <a:cs typeface="Arial"/>
-              </a:rPr>
-              <a:t> </a:t>
-            </a:r>
-            <a:r>
-              <a:rPr lang="en-US" sz="2000" dirty="0" err="1">
-                <a:ea typeface="Inter"/>
-                <a:cs typeface="Arial"/>
-              </a:rPr>
-              <a:t>Liidu</a:t>
-            </a:r>
-            <a:r>
-              <a:rPr lang="en-US" sz="2000" dirty="0">
-                <a:ea typeface="Inter"/>
-                <a:cs typeface="Arial"/>
-              </a:rPr>
-              <a:t> </a:t>
-            </a:r>
-            <a:r>
-              <a:rPr lang="en-US" sz="2000" dirty="0" err="1">
-                <a:ea typeface="Inter"/>
-                <a:cs typeface="Arial"/>
-              </a:rPr>
-              <a:t>määrus</a:t>
-            </a:r>
-            <a:r>
-              <a:rPr lang="en-US" sz="2000" dirty="0">
-                <a:ea typeface="Inter"/>
-                <a:cs typeface="Arial"/>
-              </a:rPr>
-              <a:t>, </a:t>
-            </a:r>
-            <a:r>
-              <a:rPr lang="en-US" sz="2000" dirty="0" err="1">
-                <a:ea typeface="Inter"/>
-                <a:cs typeface="Arial"/>
-              </a:rPr>
-              <a:t>mida</a:t>
-            </a:r>
-            <a:r>
-              <a:rPr lang="en-US" sz="2000" dirty="0">
-                <a:ea typeface="Inter"/>
-                <a:cs typeface="Arial"/>
-              </a:rPr>
-              <a:t> </a:t>
-            </a:r>
-            <a:r>
-              <a:rPr lang="en-US" sz="2000" dirty="0" err="1">
-                <a:ea typeface="Inter"/>
-                <a:cs typeface="Arial"/>
-              </a:rPr>
-              <a:t>kohaldatakse</a:t>
-            </a:r>
-            <a:r>
-              <a:rPr lang="en-US" sz="2000" dirty="0">
-                <a:ea typeface="Inter"/>
-                <a:cs typeface="Arial"/>
-              </a:rPr>
-              <a:t> </a:t>
-            </a:r>
-            <a:r>
-              <a:rPr lang="en-US" sz="2000" dirty="0" err="1">
-                <a:ea typeface="Inter"/>
-                <a:cs typeface="Arial"/>
-              </a:rPr>
-              <a:t>Eestis</a:t>
-            </a:r>
-            <a:r>
-              <a:rPr lang="en-US" sz="2000" dirty="0">
-                <a:ea typeface="Inter"/>
-                <a:cs typeface="Arial"/>
-              </a:rPr>
-              <a:t> 2018. </a:t>
-            </a:r>
-            <a:r>
-              <a:rPr lang="en-US" sz="2000" dirty="0" err="1">
-                <a:ea typeface="Inter"/>
-                <a:cs typeface="Arial"/>
-              </a:rPr>
-              <a:t>aastast</a:t>
-            </a:r>
-            <a:endParaRPr lang="en-US" sz="2000" dirty="0">
-              <a:cs typeface="Arial"/>
-            </a:endParaRPr>
-          </a:p>
-          <a:p>
-            <a:pPr marL="857250" lvl="1" indent="-228600">
-              <a:lnSpc>
-                <a:spcPct val="150000"/>
-              </a:lnSpc>
-              <a:buFont typeface="Courier New" panose="020B0502030000000004" pitchFamily="34" charset="0"/>
-              <a:buChar char="o"/>
-            </a:pPr>
-            <a:r>
-              <a:rPr lang="en-US" sz="2000" dirty="0" err="1">
-                <a:ea typeface="Inter"/>
-                <a:cs typeface="Arial"/>
-              </a:rPr>
-              <a:t>Isikuandmed</a:t>
-            </a:r>
-            <a:r>
-              <a:rPr lang="en-US" sz="2000" dirty="0">
-                <a:ea typeface="Inter"/>
-                <a:cs typeface="Arial"/>
-              </a:rPr>
-              <a:t> – </a:t>
-            </a:r>
-            <a:r>
-              <a:rPr lang="en-US" sz="2000" dirty="0" err="1">
-                <a:ea typeface="Inter"/>
-                <a:cs typeface="Arial"/>
-              </a:rPr>
-              <a:t>andmed</a:t>
-            </a:r>
-            <a:r>
-              <a:rPr lang="en-US" sz="2000" dirty="0">
-                <a:ea typeface="Inter"/>
-                <a:cs typeface="Arial"/>
-              </a:rPr>
-              <a:t> </a:t>
-            </a:r>
-            <a:r>
-              <a:rPr lang="en-US" sz="2000" b="1" dirty="0" err="1">
-                <a:ea typeface="Inter"/>
-                <a:cs typeface="Arial"/>
-              </a:rPr>
-              <a:t>füüsilise</a:t>
-            </a:r>
-            <a:r>
-              <a:rPr lang="en-US" sz="2000" b="1" dirty="0">
-                <a:ea typeface="Inter"/>
-                <a:cs typeface="Arial"/>
-              </a:rPr>
-              <a:t> </a:t>
-            </a:r>
-            <a:r>
-              <a:rPr lang="en-US" sz="2000" b="1" dirty="0" err="1">
-                <a:ea typeface="Inter"/>
-                <a:cs typeface="Arial"/>
-              </a:rPr>
-              <a:t>isiku</a:t>
-            </a:r>
-            <a:r>
-              <a:rPr lang="en-US" sz="2000" b="1" dirty="0">
-                <a:ea typeface="Inter"/>
-                <a:cs typeface="Arial"/>
-              </a:rPr>
-              <a:t> </a:t>
-            </a:r>
-            <a:r>
-              <a:rPr lang="en-US" sz="2000" b="1" dirty="0" err="1">
-                <a:ea typeface="Inter"/>
-                <a:cs typeface="Arial"/>
-              </a:rPr>
-              <a:t>kohta</a:t>
-            </a:r>
-            <a:r>
-              <a:rPr lang="en-US" sz="2000" dirty="0">
-                <a:ea typeface="Inter"/>
-                <a:cs typeface="Arial"/>
-              </a:rPr>
-              <a:t>, </a:t>
-            </a:r>
-            <a:r>
-              <a:rPr lang="en-US" sz="2000" dirty="0" err="1">
-                <a:ea typeface="Inter"/>
-                <a:cs typeface="Arial"/>
-              </a:rPr>
-              <a:t>mille</a:t>
-            </a:r>
-            <a:r>
-              <a:rPr lang="en-US" sz="2000" dirty="0">
-                <a:ea typeface="Inter"/>
-                <a:cs typeface="Arial"/>
-              </a:rPr>
-              <a:t> </a:t>
-            </a:r>
-            <a:r>
-              <a:rPr lang="en-US" sz="2000" dirty="0" err="1">
-                <a:ea typeface="Inter"/>
-                <a:cs typeface="Arial"/>
-              </a:rPr>
-              <a:t>abil</a:t>
-            </a:r>
-            <a:r>
-              <a:rPr lang="en-US" sz="2000" dirty="0">
-                <a:ea typeface="Inter"/>
-                <a:cs typeface="Arial"/>
-              </a:rPr>
-              <a:t> on </a:t>
-            </a:r>
-            <a:r>
-              <a:rPr lang="en-US" sz="2000" dirty="0" err="1">
-                <a:ea typeface="Inter"/>
-                <a:cs typeface="Arial"/>
-              </a:rPr>
-              <a:t>isikut</a:t>
-            </a:r>
-            <a:r>
-              <a:rPr lang="en-US" sz="2000" dirty="0">
-                <a:ea typeface="Inter"/>
-                <a:cs typeface="Arial"/>
-              </a:rPr>
-              <a:t> </a:t>
-            </a:r>
-            <a:r>
-              <a:rPr lang="en-US" sz="2000" dirty="0" err="1">
-                <a:ea typeface="Inter"/>
-                <a:cs typeface="Arial"/>
-              </a:rPr>
-              <a:t>otseselt</a:t>
-            </a:r>
-            <a:r>
-              <a:rPr lang="en-US" sz="2000" dirty="0">
-                <a:ea typeface="Inter"/>
-                <a:cs typeface="Arial"/>
-              </a:rPr>
-              <a:t> </a:t>
-            </a:r>
-            <a:r>
-              <a:rPr lang="en-US" sz="2000" dirty="0" err="1">
-                <a:ea typeface="Inter"/>
-                <a:cs typeface="Arial"/>
-              </a:rPr>
-              <a:t>või</a:t>
-            </a:r>
-            <a:r>
-              <a:rPr lang="en-US" sz="2000" dirty="0">
-                <a:ea typeface="Inter"/>
-                <a:cs typeface="Arial"/>
-              </a:rPr>
-              <a:t> </a:t>
-            </a:r>
-            <a:r>
-              <a:rPr lang="en-US" sz="2000" dirty="0" err="1">
-                <a:ea typeface="Inter"/>
-                <a:cs typeface="Arial"/>
-              </a:rPr>
-              <a:t>kaudselt</a:t>
-            </a:r>
-            <a:r>
-              <a:rPr lang="en-US" sz="2000" dirty="0">
-                <a:ea typeface="Inter"/>
-                <a:cs typeface="Arial"/>
-              </a:rPr>
-              <a:t> </a:t>
-            </a:r>
-            <a:r>
-              <a:rPr lang="en-US" sz="2000" dirty="0" err="1">
-                <a:ea typeface="Inter"/>
-                <a:cs typeface="Arial"/>
-              </a:rPr>
-              <a:t>võimalik</a:t>
-            </a:r>
-            <a:r>
-              <a:rPr lang="en-US" sz="2000" dirty="0">
-                <a:ea typeface="Inter"/>
-                <a:cs typeface="Arial"/>
-              </a:rPr>
-              <a:t> </a:t>
-            </a:r>
-            <a:r>
-              <a:rPr lang="en-US" sz="2000" dirty="0" err="1">
-                <a:ea typeface="Inter"/>
-                <a:cs typeface="Arial"/>
-              </a:rPr>
-              <a:t>tuvastada</a:t>
-            </a:r>
-            <a:endParaRPr lang="en-US" sz="2000" dirty="0">
-              <a:ea typeface="Inter"/>
-              <a:cs typeface="Arial"/>
-            </a:endParaRPr>
-          </a:p>
-          <a:p>
-            <a:pPr marL="857250" lvl="1" indent="-228600">
-              <a:lnSpc>
-                <a:spcPct val="150000"/>
-              </a:lnSpc>
-              <a:buFont typeface="Courier New" panose="020B0502030000000004" pitchFamily="34" charset="0"/>
-              <a:buChar char="o"/>
-            </a:pPr>
-            <a:r>
-              <a:rPr lang="en-US" dirty="0" err="1">
-                <a:ea typeface="Inter"/>
-                <a:cs typeface="Arial"/>
-              </a:rPr>
-              <a:t>Lisainfo</a:t>
-            </a:r>
-            <a:r>
-              <a:rPr lang="en-US" dirty="0">
-                <a:ea typeface="Inter"/>
-                <a:cs typeface="Arial"/>
-              </a:rPr>
-              <a:t>: </a:t>
-            </a:r>
-            <a:r>
-              <a:rPr lang="en-US" dirty="0">
-                <a:ea typeface="Inter"/>
-                <a:cs typeface="Arial"/>
-                <a:hlinkClick r:id="rId4"/>
-              </a:rPr>
-              <a:t>https://www.edpb.europa.eu/sme-data-protection-guide/faq-frequently-asked-questions_en</a:t>
-            </a:r>
-            <a:r>
-              <a:rPr lang="en-US" dirty="0">
-                <a:ea typeface="Inter"/>
-                <a:cs typeface="Arial"/>
-              </a:rPr>
-              <a:t> </a:t>
-            </a:r>
-            <a:endParaRPr lang="en-US" dirty="0">
-              <a:cs typeface="Arial"/>
-            </a:endParaRPr>
-          </a:p>
-          <a:p>
-            <a:pPr>
-              <a:lnSpc>
-                <a:spcPct val="150000"/>
-              </a:lnSpc>
-              <a:buClr>
-                <a:srgbClr val="121212"/>
-              </a:buClr>
-              <a:buFont typeface="Arial" panose="020B0502030000000004" pitchFamily="34" charset="0"/>
-              <a:buChar char="•"/>
-            </a:pPr>
-            <a:r>
-              <a:rPr lang="en-US" sz="2000" dirty="0" err="1">
-                <a:ea typeface="Inter"/>
-                <a:cs typeface="Arial"/>
-                <a:hlinkClick r:id="rId5"/>
-              </a:rPr>
-              <a:t>Isikuandmete</a:t>
-            </a:r>
-            <a:r>
-              <a:rPr lang="en-US" sz="2000" dirty="0">
-                <a:ea typeface="Inter"/>
-                <a:cs typeface="Arial"/>
-                <a:hlinkClick r:id="rId5"/>
-              </a:rPr>
-              <a:t> </a:t>
-            </a:r>
-            <a:r>
-              <a:rPr lang="en-US" sz="2000" dirty="0" err="1">
-                <a:ea typeface="Inter"/>
-                <a:cs typeface="Arial"/>
-                <a:hlinkClick r:id="rId5"/>
-              </a:rPr>
-              <a:t>kaitse</a:t>
-            </a:r>
-            <a:r>
-              <a:rPr lang="en-US" sz="2000" dirty="0">
-                <a:ea typeface="Inter"/>
-                <a:cs typeface="Arial"/>
-                <a:hlinkClick r:id="rId5"/>
-              </a:rPr>
-              <a:t> </a:t>
-            </a:r>
-            <a:r>
-              <a:rPr lang="en-US" sz="2000" dirty="0" err="1">
-                <a:ea typeface="Inter"/>
-                <a:cs typeface="Arial"/>
-                <a:hlinkClick r:id="rId5"/>
-              </a:rPr>
-              <a:t>seadus</a:t>
-            </a:r>
-            <a:endParaRPr lang="en-US" sz="2000" dirty="0">
-              <a:ea typeface="Inter"/>
-              <a:cs typeface="Arial"/>
-            </a:endParaRPr>
-          </a:p>
-          <a:p>
-            <a:pPr marL="857250" lvl="1" indent="-228600">
-              <a:lnSpc>
-                <a:spcPct val="150000"/>
-              </a:lnSpc>
-              <a:buFont typeface="Courier New" panose="020B0502030000000004" pitchFamily="34" charset="0"/>
-              <a:buChar char="o"/>
-            </a:pPr>
-            <a:r>
-              <a:rPr lang="en-US" sz="2000" dirty="0">
-                <a:ea typeface="Inter"/>
-                <a:cs typeface="Arial"/>
-              </a:rPr>
-              <a:t>Täpsustab ja </a:t>
-            </a:r>
-            <a:r>
-              <a:rPr lang="en-US" sz="2000" dirty="0" err="1">
-                <a:ea typeface="Inter"/>
-                <a:cs typeface="Arial"/>
-              </a:rPr>
-              <a:t>täiendab</a:t>
-            </a:r>
-            <a:r>
-              <a:rPr lang="en-US" sz="2000" dirty="0">
-                <a:ea typeface="Inter"/>
-                <a:cs typeface="Arial"/>
-              </a:rPr>
-              <a:t> IKÜM-</a:t>
-            </a:r>
-            <a:r>
-              <a:rPr lang="en-US" sz="2000" dirty="0" err="1">
-                <a:ea typeface="Inter"/>
-                <a:cs typeface="Arial"/>
-              </a:rPr>
-              <a:t>i</a:t>
-            </a:r>
-            <a:endParaRPr lang="en-US" sz="2000" dirty="0">
-              <a:ea typeface="Inter"/>
-              <a:cs typeface="Arial"/>
-            </a:endParaRPr>
-          </a:p>
-          <a:p>
-            <a:pPr marL="342900" indent="-342900">
-              <a:lnSpc>
-                <a:spcPct val="150000"/>
-              </a:lnSpc>
-              <a:buClr>
-                <a:srgbClr val="121212"/>
-              </a:buClr>
-              <a:buFont typeface="Arial" panose="020B0502030000000004" pitchFamily="34" charset="0"/>
-              <a:buChar char="•"/>
-            </a:pPr>
-            <a:r>
-              <a:rPr lang="en-US" sz="2000" dirty="0" err="1">
-                <a:ea typeface="Inter"/>
-                <a:cs typeface="Arial"/>
-              </a:rPr>
-              <a:t>Eestis</a:t>
-            </a:r>
-            <a:r>
-              <a:rPr lang="en-US" sz="2000" dirty="0">
-                <a:ea typeface="Inter"/>
-                <a:cs typeface="Arial"/>
-              </a:rPr>
-              <a:t> </a:t>
-            </a:r>
-            <a:r>
-              <a:rPr lang="en-US" sz="2000" dirty="0" err="1">
-                <a:ea typeface="Inter"/>
-                <a:cs typeface="Arial"/>
-              </a:rPr>
-              <a:t>teostab</a:t>
-            </a:r>
-            <a:r>
-              <a:rPr lang="en-US" sz="2000" dirty="0">
-                <a:ea typeface="Inter"/>
-                <a:cs typeface="Arial"/>
-              </a:rPr>
-              <a:t> </a:t>
-            </a:r>
-            <a:r>
-              <a:rPr lang="en-US" sz="2000" dirty="0" err="1">
-                <a:ea typeface="Inter"/>
-                <a:cs typeface="Arial"/>
-              </a:rPr>
-              <a:t>järelvalvet</a:t>
-            </a:r>
-            <a:r>
-              <a:rPr lang="en-US" sz="2000" dirty="0">
-                <a:ea typeface="Inter"/>
-                <a:cs typeface="Arial"/>
-              </a:rPr>
-              <a:t> </a:t>
-            </a:r>
-            <a:r>
-              <a:rPr lang="en-US" sz="2000" dirty="0" err="1">
-                <a:ea typeface="Inter"/>
-                <a:cs typeface="Arial"/>
-              </a:rPr>
-              <a:t>Andmekaitse</a:t>
-            </a:r>
-            <a:r>
-              <a:rPr lang="en-US" sz="2000" dirty="0">
-                <a:ea typeface="Inter"/>
-                <a:cs typeface="Arial"/>
-              </a:rPr>
-              <a:t> </a:t>
-            </a:r>
-            <a:r>
-              <a:rPr lang="en-US" sz="2000" dirty="0" err="1">
-                <a:ea typeface="Inter"/>
-                <a:cs typeface="Arial"/>
-              </a:rPr>
-              <a:t>Inspektsioon</a:t>
-            </a:r>
-            <a:endParaRPr lang="en-US" sz="2000" dirty="0">
-              <a:cs typeface="Arial"/>
-            </a:endParaRPr>
-          </a:p>
-          <a:p>
-            <a:pPr marL="857250" lvl="1" indent="-342900">
-              <a:lnSpc>
-                <a:spcPct val="150000"/>
-              </a:lnSpc>
-              <a:buFont typeface="Courier New" panose="020B0502030000000004" pitchFamily="34" charset="0"/>
-              <a:buChar char="o"/>
-            </a:pPr>
-            <a:endParaRPr lang="en-US" sz="2400" dirty="0">
-              <a:cs typeface="Arial"/>
-            </a:endParaRPr>
-          </a:p>
-          <a:p>
-            <a:pPr marL="342900" indent="-342900">
-              <a:lnSpc>
-                <a:spcPct val="150000"/>
-              </a:lnSpc>
-              <a:buClr>
-                <a:srgbClr val="121212"/>
-              </a:buClr>
-              <a:buFont typeface="Arial" panose="020B0502030000000004" pitchFamily="34" charset="0"/>
-              <a:buChar char="•"/>
-            </a:pPr>
-            <a:endParaRPr lang="en-US" sz="2400" dirty="0">
-              <a:cs typeface="Arial"/>
-            </a:endParaRPr>
-          </a:p>
-          <a:p>
-            <a:pPr marL="514350" indent="-514350">
-              <a:lnSpc>
-                <a:spcPct val="150000"/>
-              </a:lnSpc>
-              <a:buFont typeface="Arial" panose="020B0502030000000004" pitchFamily="34" charset="0"/>
-              <a:buChar char="•"/>
-            </a:pPr>
-            <a:endParaRPr lang="en-US" sz="2800" dirty="0">
-              <a:cs typeface="Arial"/>
-            </a:endParaRPr>
-          </a:p>
-          <a:p>
-            <a:pPr marL="0" indent="0">
-              <a:lnSpc>
-                <a:spcPct val="150000"/>
-              </a:lnSpc>
-              <a:buNone/>
-            </a:pPr>
-            <a:endParaRPr lang="en-US" sz="2800" dirty="0"/>
-          </a:p>
-        </p:txBody>
-      </p:sp>
-    </p:spTree>
-    <p:extLst>
-      <p:ext uri="{BB962C8B-B14F-4D97-AF65-F5344CB8AC3E}">
-        <p14:creationId xmlns:p14="http://schemas.microsoft.com/office/powerpoint/2010/main" val="223049910"/>
-      </p:ext>
-    </p:extLst>
-  </p:cSld>
-  <p:clrMapOvr>
-    <a:masterClrMapping/>
-  </p:clrMapOvr>
-  <p:timing>
-    <p:tnLst>
-      <p:par>
-        <p:cTn id="1" dur="indefinite" restart="never" nodeType="tmRoot">
-          <p:childTnLst>
-            <p:seq concurrent="1" nextAc="seek">
-              <p:cTn id="2" dur="indefinite" nodeType="mainSeq">
-                <p:childTnLst>
-                  <p:par>
-                    <p:cTn id="3" fill="hold">
-                      <p:stCondLst>
-                        <p:cond delay="indefinite"/>
-                      </p:stCondLst>
-                      <p:childTnLst>
-                        <p:par>
-                          <p:cTn id="4" fill="hold">
-                            <p:stCondLst>
-                              <p:cond delay="0"/>
-                            </p:stCondLst>
-                            <p:childTnLst>
-                              <p:par>
-                                <p:cTn id="5" presetID="1" presetClass="entr" presetSubtype="0" fill="hold" grpId="0" nodeType="clickEffect">
-                                  <p:stCondLst>
-                                    <p:cond delay="0"/>
-                                  </p:stCondLst>
-                                  <p:childTnLst>
-                                    <p:set>
-                                      <p:cBhvr>
-                                        <p:cTn id="6" dur="1" fill="hold">
-                                          <p:stCondLst>
-                                            <p:cond delay="0"/>
-                                          </p:stCondLst>
-                                        </p:cTn>
-                                        <p:tgtEl>
-                                          <p:spTgt spid="3">
-                                            <p:txEl>
-                                              <p:pRg st="0" end="0"/>
-                                            </p:txEl>
-                                          </p:spTgt>
-                                        </p:tgtEl>
-                                        <p:attrNameLst>
-                                          <p:attrName>style.visibility</p:attrName>
-                                        </p:attrNameLst>
-                                      </p:cBhvr>
-                                      <p:to>
-                                        <p:strVal val="visible"/>
-                                      </p:to>
-                                    </p:set>
-                                  </p:childTnLst>
-                                </p:cTn>
-                              </p:par>
-                            </p:childTnLst>
-                          </p:cTn>
-                        </p:par>
-                      </p:childTnLst>
-                    </p:cTn>
-                  </p:par>
-                  <p:par>
-                    <p:cTn id="7" fill="hold">
-                      <p:stCondLst>
-                        <p:cond delay="indefinite"/>
-                      </p:stCondLst>
-                      <p:childTnLst>
-                        <p:par>
-                          <p:cTn id="8" fill="hold">
-                            <p:stCondLst>
-                              <p:cond delay="0"/>
-                            </p:stCondLst>
-                            <p:childTnLst>
-                              <p:par>
-                                <p:cTn id="9" presetID="1" presetClass="entr" presetSubtype="0" fill="hold" grpId="0" nodeType="clickEffect">
-                                  <p:stCondLst>
-                                    <p:cond delay="0"/>
-                                  </p:stCondLst>
-                                  <p:childTnLst>
-                                    <p:set>
-                                      <p:cBhvr>
-                                        <p:cTn id="10" dur="1" fill="hold">
-                                          <p:stCondLst>
-                                            <p:cond delay="0"/>
-                                          </p:stCondLst>
-                                        </p:cTn>
-                                        <p:tgtEl>
-                                          <p:spTgt spid="3">
-                                            <p:txEl>
-                                              <p:pRg st="1" end="1"/>
-                                            </p:txEl>
-                                          </p:spTgt>
-                                        </p:tgtEl>
-                                        <p:attrNameLst>
-                                          <p:attrName>style.visibility</p:attrName>
-                                        </p:attrNameLst>
-                                      </p:cBhvr>
-                                      <p:to>
-                                        <p:strVal val="visible"/>
-                                      </p:to>
-                                    </p:set>
-                                  </p:childTnLst>
-                                </p:cTn>
-                              </p:par>
-                            </p:childTnLst>
-                          </p:cTn>
-                        </p:par>
-                      </p:childTnLst>
-                    </p:cTn>
-                  </p:par>
-                  <p:par>
-                    <p:cTn id="11" fill="hold">
-                      <p:stCondLst>
-                        <p:cond delay="indefinite"/>
-                      </p:stCondLst>
-                      <p:childTnLst>
-                        <p:par>
-                          <p:cTn id="12" fill="hold">
-                            <p:stCondLst>
-                              <p:cond delay="0"/>
-                            </p:stCondLst>
-                            <p:childTnLst>
-                              <p:par>
-                                <p:cTn id="13" presetID="1" presetClass="entr" presetSubtype="0" fill="hold" grpId="0" nodeType="clickEffect">
-                                  <p:stCondLst>
-                                    <p:cond delay="0"/>
-                                  </p:stCondLst>
-                                  <p:childTnLst>
-                                    <p:set>
-                                      <p:cBhvr>
-                                        <p:cTn id="14" dur="1" fill="hold">
-                                          <p:stCondLst>
-                                            <p:cond delay="0"/>
-                                          </p:stCondLst>
-                                        </p:cTn>
-                                        <p:tgtEl>
-                                          <p:spTgt spid="3">
-                                            <p:txEl>
-                                              <p:pRg st="2" end="2"/>
-                                            </p:txEl>
-                                          </p:spTgt>
-                                        </p:tgtEl>
-                                        <p:attrNameLst>
-                                          <p:attrName>style.visibility</p:attrName>
-                                        </p:attrNameLst>
-                                      </p:cBhvr>
-                                      <p:to>
-                                        <p:strVal val="visible"/>
-                                      </p:to>
-                                    </p:set>
-                                  </p:childTnLst>
-                                </p:cTn>
-                              </p:par>
-                              <p:par>
-                                <p:cTn id="15" presetID="1" presetClass="entr" presetSubtype="0" fill="hold" grpId="0" nodeType="withEffect">
-                                  <p:stCondLst>
-                                    <p:cond delay="0"/>
-                                  </p:stCondLst>
-                                  <p:childTnLst>
-                                    <p:set>
-                                      <p:cBhvr>
-                                        <p:cTn id="16" dur="1" fill="hold">
-                                          <p:stCondLst>
-                                            <p:cond delay="0"/>
-                                          </p:stCondLst>
-                                        </p:cTn>
-                                        <p:tgtEl>
-                                          <p:spTgt spid="3">
-                                            <p:txEl>
-                                              <p:pRg st="3" end="3"/>
-                                            </p:txEl>
-                                          </p:spTgt>
-                                        </p:tgtEl>
-                                        <p:attrNameLst>
-                                          <p:attrName>style.visibility</p:attrName>
-                                        </p:attrNameLst>
-                                      </p:cBhvr>
-                                      <p:to>
-                                        <p:strVal val="visible"/>
-                                      </p:to>
-                                    </p:set>
-                                  </p:childTnLst>
-                                </p:cTn>
-                              </p:par>
-                              <p:par>
-                                <p:cTn id="17" presetID="1" presetClass="entr" presetSubtype="0" fill="hold" grpId="0" nodeType="withEffect">
-                                  <p:stCondLst>
-                                    <p:cond delay="0"/>
-                                  </p:stCondLst>
-                                  <p:childTnLst>
-                                    <p:set>
-                                      <p:cBhvr>
-                                        <p:cTn id="18" dur="1" fill="hold">
-                                          <p:stCondLst>
-                                            <p:cond delay="0"/>
-                                          </p:stCondLst>
-                                        </p:cTn>
-                                        <p:tgtEl>
-                                          <p:spTgt spid="3">
-                                            <p:txEl>
-                                              <p:pRg st="4" end="4"/>
-                                            </p:txEl>
-                                          </p:spTgt>
-                                        </p:tgtEl>
-                                        <p:attrNameLst>
-                                          <p:attrName>style.visibility</p:attrName>
-                                        </p:attrNameLst>
-                                      </p:cBhvr>
-                                      <p:to>
-                                        <p:strVal val="visible"/>
-                                      </p:to>
-                                    </p:set>
-                                  </p:childTnLst>
-                                </p:cTn>
-                              </p:par>
-                              <p:par>
-                                <p:cTn id="19" presetID="1" presetClass="entr" presetSubtype="0" fill="hold" grpId="0" nodeType="withEffect">
-                                  <p:stCondLst>
-                                    <p:cond delay="0"/>
-                                  </p:stCondLst>
-                                  <p:childTnLst>
-                                    <p:set>
-                                      <p:cBhvr>
-                                        <p:cTn id="20" dur="1" fill="hold">
-                                          <p:stCondLst>
-                                            <p:cond delay="0"/>
-                                          </p:stCondLst>
-                                        </p:cTn>
-                                        <p:tgtEl>
-                                          <p:spTgt spid="3">
-                                            <p:txEl>
-                                              <p:pRg st="5" end="5"/>
-                                            </p:txEl>
-                                          </p:spTgt>
-                                        </p:tgtEl>
-                                        <p:attrNameLst>
-                                          <p:attrName>style.visibility</p:attrName>
-                                        </p:attrNameLst>
-                                      </p:cBhvr>
-                                      <p:to>
-                                        <p:strVal val="visible"/>
-                                      </p:to>
-                                    </p:set>
-                                  </p:childTnLst>
-                                </p:cTn>
-                              </p:par>
-                            </p:childTnLst>
-                          </p:cTn>
-                        </p:par>
-                      </p:childTnLst>
-                    </p:cTn>
-                  </p:par>
-                  <p:par>
-                    <p:cTn id="21" fill="hold">
-                      <p:stCondLst>
-                        <p:cond delay="indefinite"/>
-                      </p:stCondLst>
-                      <p:childTnLst>
-                        <p:par>
-                          <p:cTn id="22" fill="hold">
-                            <p:stCondLst>
-                              <p:cond delay="0"/>
-                            </p:stCondLst>
-                            <p:childTnLst>
-                              <p:par>
-                                <p:cTn id="23" presetID="1" presetClass="entr" presetSubtype="0" fill="hold" grpId="0" nodeType="clickEffect">
-                                  <p:stCondLst>
-                                    <p:cond delay="0"/>
-                                  </p:stCondLst>
-                                  <p:childTnLst>
-                                    <p:set>
-                                      <p:cBhvr>
-                                        <p:cTn id="24" dur="1" fill="hold">
-                                          <p:stCondLst>
-                                            <p:cond delay="0"/>
-                                          </p:stCondLst>
-                                        </p:cTn>
-                                        <p:tgtEl>
-                                          <p:spTgt spid="3">
-                                            <p:txEl>
-                                              <p:pRg st="6" end="6"/>
-                                            </p:txEl>
-                                          </p:spTgt>
-                                        </p:tgtEl>
-                                        <p:attrNameLst>
-                                          <p:attrName>style.visibility</p:attrName>
-                                        </p:attrNameLst>
-                                      </p:cBhvr>
-                                      <p:to>
-                                        <p:strVal val="visible"/>
-                                      </p:to>
-                                    </p:set>
-                                  </p:childTnLst>
-                                </p:cTn>
-                              </p:par>
-                              <p:par>
-                                <p:cTn id="25" presetID="1" presetClass="entr" presetSubtype="0" fill="hold" grpId="0" nodeType="withEffect">
-                                  <p:stCondLst>
-                                    <p:cond delay="0"/>
-                                  </p:stCondLst>
-                                  <p:childTnLst>
-                                    <p:set>
-                                      <p:cBhvr>
-                                        <p:cTn id="26" dur="1" fill="hold">
-                                          <p:stCondLst>
-                                            <p:cond delay="0"/>
-                                          </p:stCondLst>
-                                        </p:cTn>
-                                        <p:tgtEl>
-                                          <p:spTgt spid="3">
-                                            <p:txEl>
-                                              <p:pRg st="7" end="7"/>
-                                            </p:txEl>
-                                          </p:spTgt>
-                                        </p:tgtEl>
-                                        <p:attrNameLst>
-                                          <p:attrName>style.visibility</p:attrName>
-                                        </p:attrNameLst>
-                                      </p:cBhvr>
-                                      <p:to>
-                                        <p:strVal val="visible"/>
-                                      </p:to>
-                                    </p:set>
-                                  </p:childTnLst>
-                                </p:cTn>
-                              </p:par>
-                            </p:childTnLst>
-                          </p:cTn>
-                        </p:par>
-                      </p:childTnLst>
-                    </p:cTn>
-                  </p:par>
-                  <p:par>
-                    <p:cTn id="27" fill="hold">
-                      <p:stCondLst>
-                        <p:cond delay="indefinite"/>
-                      </p:stCondLst>
-                      <p:childTnLst>
-                        <p:par>
-                          <p:cTn id="28" fill="hold">
-                            <p:stCondLst>
-                              <p:cond delay="0"/>
-                            </p:stCondLst>
-                            <p:childTnLst>
-                              <p:par>
-                                <p:cTn id="29" presetID="1" presetClass="entr" presetSubtype="0" fill="hold" grpId="0" nodeType="clickEffect">
-                                  <p:stCondLst>
-                                    <p:cond delay="0"/>
-                                  </p:stCondLst>
-                                  <p:childTnLst>
-                                    <p:set>
-                                      <p:cBhvr>
-                                        <p:cTn id="30" dur="1" fill="hold">
-                                          <p:stCondLst>
-                                            <p:cond delay="0"/>
-                                          </p:stCondLst>
-                                        </p:cTn>
-                                        <p:tgtEl>
-                                          <p:spTgt spid="3">
-                                            <p:txEl>
-                                              <p:pRg st="8" end="8"/>
-                                            </p:txEl>
-                                          </p:spTgt>
-                                        </p:tgtEl>
-                                        <p:attrNameLst>
-                                          <p:attrName>style.visibility</p:attrName>
-                                        </p:attrNameLst>
-                                      </p:cBhvr>
-                                      <p:to>
-                                        <p:strVal val="visible"/>
-                                      </p:to>
-                                    </p:set>
-                                  </p:childTnLst>
-                                </p:cTn>
-                              </p:par>
-                            </p:childTnLst>
-                          </p:cTn>
-                        </p:par>
-                      </p:childTnLst>
-                    </p:cTn>
-                  </p:par>
-                </p:childTnLst>
-              </p:cTn>
-              <p:prevCondLst>
-                <p:cond evt="onPrev" delay="0">
-                  <p:tgtEl>
-                    <p:sldTgt/>
-                  </p:tgtEl>
-                </p:cond>
-              </p:prevCondLst>
-              <p:nextCondLst>
-                <p:cond evt="onNext" delay="0">
-                  <p:tgtEl>
-                    <p:sldTgt/>
-                  </p:tgtEl>
-                </p:cond>
-              </p:nextCondLst>
-            </p:seq>
-          </p:childTnLst>
-        </p:cTn>
-      </p:par>
-    </p:tnLst>
-    <p:bldLst>
-      <p:bldP spid="3" grpId="0" build="p"/>
-    </p:bldLst>
-  </p:timing>
-</p:sld>
-</file>
-
-<file path=ppt/slides/slide30.xml><?xml version="1.0" encoding="utf-8"?>
+<file path=ppt/slides/slide31.xml><?xml version="1.0" encoding="utf-8"?>
 <p:sld xmlns:a="http://schemas.openxmlformats.org/drawingml/2006/main" xmlns:r="http://schemas.openxmlformats.org/officeDocument/2006/relationships" xmlns:p="http://schemas.openxmlformats.org/presentationml/2006/main">
   <p:cSld>
     <p:spTree>
@@ -48991,12 +49574,21 @@
 </file>
 
 <file path=customXml/item1.xml><?xml version="1.0" encoding="utf-8"?>
+<?mso-contentType ?>
+<FormTemplates xmlns="http://schemas.microsoft.com/sharepoint/v3/contenttype/forms">
+  <Display>DocumentLibraryForm</Display>
+  <Edit>DocumentLibraryForm</Edit>
+  <New>DocumentLibraryForm</New>
+</FormTemplates>
+</file>
+
+<file path=customXml/item2.xml><?xml version="1.0" encoding="utf-8"?>
 <p:properties xmlns:p="http://schemas.microsoft.com/office/2006/metadata/properties" xmlns:xsi="http://www.w3.org/2001/XMLSchema-instance" xmlns:pc="http://schemas.microsoft.com/office/infopath/2007/PartnerControls">
   <documentManagement/>
 </p:properties>
 </file>
 
-<file path=customXml/item2.xml><?xml version="1.0" encoding="utf-8"?>
+<file path=customXml/item3.xml><?xml version="1.0" encoding="utf-8"?>
 <ct:contentTypeSchema xmlns:ct="http://schemas.microsoft.com/office/2006/metadata/contentType" xmlns:ma="http://schemas.microsoft.com/office/2006/metadata/properties/metaAttributes" ct:_="" ma:_="" ma:contentTypeName="Document" ma:contentTypeID="0x010100C4D27B8FA8976546BCD79313C588588D" ma:contentTypeVersion="8" ma:contentTypeDescription="Create a new document." ma:contentTypeScope="" ma:versionID="a112c56f6fe148a79025c76584832af0">
   <xsd:schema xmlns:xsd="http://www.w3.org/2001/XMLSchema" xmlns:xs="http://www.w3.org/2001/XMLSchema" xmlns:p="http://schemas.microsoft.com/office/2006/metadata/properties" xmlns:ns2="a1a2d923-8fea-42f1-bd41-9cdfff65694e" targetNamespace="http://schemas.microsoft.com/office/2006/metadata/properties" ma:root="true" ma:fieldsID="97c8655d467eaa9470a714421e7268c0" ns2:_="">
     <xsd:import namespace="a1a2d923-8fea-42f1-bd41-9cdfff65694e"/>
@@ -49164,16 +49756,15 @@
 </ct:contentTypeSchema>
 </file>
 
-<file path=customXml/item3.xml><?xml version="1.0" encoding="utf-8"?>
-<?mso-contentType ?>
-<FormTemplates xmlns="http://schemas.microsoft.com/sharepoint/v3/contenttype/forms">
-  <Display>DocumentLibraryForm</Display>
-  <Edit>DocumentLibraryForm</Edit>
-  <New>DocumentLibraryForm</New>
-</FormTemplates>
+<file path=customXml/itemProps1.xml><?xml version="1.0" encoding="utf-8"?>
+<ds:datastoreItem xmlns:ds="http://schemas.openxmlformats.org/officeDocument/2006/customXml" ds:itemID="{9DC439CA-6F1C-4005-ACA6-A52E04DEE0A7}">
+  <ds:schemaRefs>
+    <ds:schemaRef ds:uri="http://schemas.microsoft.com/sharepoint/v3/contenttype/forms"/>
+  </ds:schemaRefs>
+</ds:datastoreItem>
 </file>
 
-<file path=customXml/itemProps1.xml><?xml version="1.0" encoding="utf-8"?>
+<file path=customXml/itemProps2.xml><?xml version="1.0" encoding="utf-8"?>
 <ds:datastoreItem xmlns:ds="http://schemas.openxmlformats.org/officeDocument/2006/customXml" ds:itemID="{5BDF4908-A52A-47DD-A794-6E02D71942FC}">
   <ds:schemaRefs>
     <ds:schemaRef ds:uri="http://schemas.microsoft.com/office/2006/metadata/properties"/>
@@ -49182,7 +49773,7 @@
 </ds:datastoreItem>
 </file>
 
-<file path=customXml/itemProps2.xml><?xml version="1.0" encoding="utf-8"?>
+<file path=customXml/itemProps3.xml><?xml version="1.0" encoding="utf-8"?>
 <ds:datastoreItem xmlns:ds="http://schemas.openxmlformats.org/officeDocument/2006/customXml" ds:itemID="{9CF4F972-2392-44D0-AA45-41AC4FDC4A59}">
   <ds:schemaRefs>
     <ds:schemaRef ds:uri="a1a2d923-8fea-42f1-bd41-9cdfff65694e"/>
@@ -49198,12 +49789,4 @@
     <ds:schemaRef ds:uri="http://www.w3.org/2001/XMLSchema"/>
   </ds:schemaRefs>
 </ds:datastoreItem>
-</file>
-
-<file path=customXml/itemProps3.xml><?xml version="1.0" encoding="utf-8"?>
-<ds:datastoreItem xmlns:ds="http://schemas.openxmlformats.org/officeDocument/2006/customXml" ds:itemID="{9DC439CA-6F1C-4005-ACA6-A52E04DEE0A7}">
-  <ds:schemaRefs>
-    <ds:schemaRef ds:uri="http://schemas.microsoft.com/sharepoint/v3/contenttype/forms"/>
-  </ds:schemaRefs>
-</ds:datastoreItem>
 </file>